--- a/assets/figures-editable/appendix-studies/a-e04.pptx
+++ b/assets/figures-editable/appendix-studies/a-e04.pptx
@@ -7,7 +7,7 @@
   <p:sldIdLst>
     <p:sldId id="256" r:id="rId7"/>
   </p:sldIdLst>
-  <p:sldSz cx="8961120" cy="5660136" type="screen4x3"/>
+  <p:sldSz cx="12191695" cy="6858000" type="screen4x3"/>
   <p:notesSz cx="6858000" cy="9144000"/>
   <p:defaultTextStyle>
     <a:defPPr>
@@ -3098,14 +3098,14 @@
       <p:grpSpPr/>
       <p:sp>
         <p:nvSpPr>
-          <p:cNvPr id="2" name="text 0" descr="sci-ppt:obj-000"/>
+          <p:cNvPr id="2" name="A-E04 text 0" descr="sci-ppt:o000"/>
           <p:cNvSpPr txBox="1"/>
           <p:nvPr/>
         </p:nvSpPr>
         <p:spPr>
           <a:xfrm>
-            <a:off x="256032" y="137160"/>
-            <a:ext cx="7315200" cy="310896"/>
+            <a:off x="274320" y="118872"/>
+            <a:ext cx="11612880" cy="340105"/>
           </a:xfrm>
           <a:prstGeom prst="rect">
             <a:avLst/>
@@ -3114,7 +3114,7 @@
           <a:effectLst/>
         </p:spPr>
         <p:txBody>
-          <a:bodyPr wrap="none" lIns="0" rIns="0" tIns="0" bIns="0" anchor="ctr">
+          <a:bodyPr wrap="none" lIns="18288" rIns="18288" tIns="18288" bIns="18288" anchor="t">
             <a:spAutoFit/>
           </a:bodyPr>
           <a:lstStyle/>
@@ -3125,67 +3125,2778 @@
               </a:spcAft>
             </a:pPr>
             <a:r>
-              <a:rPr sz="1439" b="0" i="0">
+              <a:rPr sz="1900" b="1" i="0">
                 <a:solidFill>
                   <a:srgbClr val="8EDBD4"/>
                 </a:solidFill>
                 <a:latin typeface="Arial"/>
               </a:rPr>
-              <a:t>A-E04 · Physical variable map</a:t>
-            </a:r>
-          </a:p>
-        </p:txBody>
-      </p:sp>
-      <p:sp>
-        <p:nvSpPr>
-          <p:cNvPr id="3" name="ellipse 1" descr="sci-ppt:obj-001"/>
-          <p:cNvSpPr/>
+              <a:t>A-E04 · Exact change of variable for expansion</a:t>
+            </a:r>
+          </a:p>
+        </p:txBody>
+      </p:sp>
+      <p:cxnSp>
+        <p:nvCxnSpPr>
+          <p:cNvPr id="3" name="A-E04 line 1" descr="sci-ppt:o001"/>
+          <p:cNvCxnSpPr/>
           <p:nvPr/>
-        </p:nvSpPr>
-        <p:spPr>
-          <a:xfrm>
-            <a:off x="1060704" y="914400"/>
-            <a:ext cx="1463040" cy="1463040"/>
-          </a:xfrm>
-          <a:prstGeom prst="ellipse">
+        </p:nvCxnSpPr>
+        <p:spPr>
+          <a:xfrm>
+            <a:off x="914400" y="4846320"/>
+            <a:ext cx="3108960" cy="0"/>
+          </a:xfrm>
+          <a:prstGeom prst="line">
             <a:avLst/>
           </a:prstGeom>
-          <a:noFill/>
-          <a:ln w="17780">
+          <a:ln w="19050">
             <a:solidFill>
               <a:srgbClr val="B4C7D2"/>
             </a:solidFill>
           </a:ln>
           <a:effectLst/>
         </p:spPr>
-        <p:txBody>
-          <a:bodyPr rtlCol="0" anchor="ctr"/>
-          <a:lstStyle/>
-          <a:p>
-            <a:pPr algn="ctr"/>
-          </a:p>
-        </p:txBody>
-      </p:sp>
-      <p:sp>
-        <p:nvSpPr>
-          <p:cNvPr id="4" name="ellipse 2" descr="sci-ppt:obj-002"/>
+      </p:cxnSp>
+      <p:cxnSp>
+        <p:nvCxnSpPr>
+          <p:cNvPr id="4" name="A-E04 line 2" descr="sci-ppt:o002"/>
+          <p:cNvCxnSpPr/>
+          <p:nvPr/>
+        </p:nvCxnSpPr>
+        <p:spPr>
+          <a:xfrm>
+            <a:off x="914400" y="1371600"/>
+            <a:ext cx="0" cy="3474720"/>
+          </a:xfrm>
+          <a:prstGeom prst="line">
+            <a:avLst/>
+          </a:prstGeom>
+          <a:ln w="19050">
+            <a:solidFill>
+              <a:srgbClr val="B4C7D2"/>
+            </a:solidFill>
+          </a:ln>
+          <a:effectLst/>
+        </p:spPr>
+      </p:cxnSp>
+      <p:cxnSp>
+        <p:nvCxnSpPr>
+          <p:cNvPr id="5" name="A-E04 line 3" descr="sci-ppt:o003"/>
+          <p:cNvCxnSpPr/>
+          <p:nvPr/>
+        </p:nvCxnSpPr>
+        <p:spPr>
+          <a:xfrm>
+            <a:off x="914400" y="4846320"/>
+            <a:ext cx="0" cy="64008"/>
+          </a:xfrm>
+          <a:prstGeom prst="line">
+            <a:avLst/>
+          </a:prstGeom>
+          <a:ln w="12700">
+            <a:solidFill>
+              <a:srgbClr val="B4C7D2"/>
+            </a:solidFill>
+          </a:ln>
+          <a:effectLst/>
+        </p:spPr>
+      </p:cxnSp>
+      <p:cxnSp>
+        <p:nvCxnSpPr>
+          <p:cNvPr id="6" name="A-E04 line 4" descr="sci-ppt:o004"/>
+          <p:cNvCxnSpPr/>
+          <p:nvPr/>
+        </p:nvCxnSpPr>
+        <p:spPr>
+          <a:xfrm>
+            <a:off x="914400" y="1371600"/>
+            <a:ext cx="0" cy="3474720"/>
+          </a:xfrm>
+          <a:prstGeom prst="line">
+            <a:avLst/>
+          </a:prstGeom>
+          <a:ln w="7620">
+            <a:solidFill>
+              <a:srgbClr val="2E4756"/>
+            </a:solidFill>
+          </a:ln>
+          <a:effectLst/>
+        </p:spPr>
+      </p:cxnSp>
+      <p:sp>
+        <p:nvSpPr>
+          <p:cNvPr id="7" name="A-E04 text 5" descr="sci-ppt:o005"/>
+          <p:cNvSpPr txBox="1"/>
+          <p:nvPr/>
+        </p:nvSpPr>
+        <p:spPr>
+          <a:xfrm>
+            <a:off x="457200" y="4928616"/>
+            <a:ext cx="914400" cy="208407"/>
+          </a:xfrm>
+          <a:prstGeom prst="rect">
+            <a:avLst/>
+          </a:prstGeom>
+          <a:noFill/>
+          <a:effectLst/>
+        </p:spPr>
+        <p:txBody>
+          <a:bodyPr wrap="none" lIns="18288" rIns="18288" tIns="18288" bIns="18288" anchor="t">
+            <a:spAutoFit/>
+          </a:bodyPr>
+          <a:lstStyle/>
+          <a:p>
+            <a:pPr algn="ctr">
+              <a:spcAft>
+                <a:spcPts val="0"/>
+              </a:spcAft>
+            </a:pPr>
+            <a:r>
+              <a:rPr sz="1050" b="0" i="0">
+                <a:solidFill>
+                  <a:srgbClr val="B4C7D2"/>
+                </a:solidFill>
+                <a:latin typeface="Arial"/>
+              </a:rPr>
+              <a:t>1</a:t>
+            </a:r>
+          </a:p>
+        </p:txBody>
+      </p:sp>
+      <p:cxnSp>
+        <p:nvCxnSpPr>
+          <p:cNvPr id="8" name="A-E04 line 6" descr="sci-ppt:o006"/>
+          <p:cNvCxnSpPr/>
+          <p:nvPr/>
+        </p:nvCxnSpPr>
+        <p:spPr>
+          <a:xfrm>
+            <a:off x="2246811" y="4846320"/>
+            <a:ext cx="0" cy="64008"/>
+          </a:xfrm>
+          <a:prstGeom prst="line">
+            <a:avLst/>
+          </a:prstGeom>
+          <a:ln w="12700">
+            <a:solidFill>
+              <a:srgbClr val="B4C7D2"/>
+            </a:solidFill>
+          </a:ln>
+          <a:effectLst/>
+        </p:spPr>
+      </p:cxnSp>
+      <p:cxnSp>
+        <p:nvCxnSpPr>
+          <p:cNvPr id="9" name="A-E04 line 7" descr="sci-ppt:o007"/>
+          <p:cNvCxnSpPr/>
+          <p:nvPr/>
+        </p:nvCxnSpPr>
+        <p:spPr>
+          <a:xfrm>
+            <a:off x="2246811" y="1371600"/>
+            <a:ext cx="0" cy="3474720"/>
+          </a:xfrm>
+          <a:prstGeom prst="line">
+            <a:avLst/>
+          </a:prstGeom>
+          <a:ln w="7620">
+            <a:solidFill>
+              <a:srgbClr val="2E4756"/>
+            </a:solidFill>
+          </a:ln>
+          <a:effectLst/>
+        </p:spPr>
+      </p:cxnSp>
+      <p:sp>
+        <p:nvSpPr>
+          <p:cNvPr id="10" name="A-E04 text 8" descr="sci-ppt:o008"/>
+          <p:cNvSpPr txBox="1"/>
+          <p:nvPr/>
+        </p:nvSpPr>
+        <p:spPr>
+          <a:xfrm>
+            <a:off x="1789611" y="4928616"/>
+            <a:ext cx="914400" cy="208407"/>
+          </a:xfrm>
+          <a:prstGeom prst="rect">
+            <a:avLst/>
+          </a:prstGeom>
+          <a:noFill/>
+          <a:effectLst/>
+        </p:spPr>
+        <p:txBody>
+          <a:bodyPr wrap="none" lIns="18288" rIns="18288" tIns="18288" bIns="18288" anchor="t">
+            <a:spAutoFit/>
+          </a:bodyPr>
+          <a:lstStyle/>
+          <a:p>
+            <a:pPr algn="ctr">
+              <a:spcAft>
+                <a:spcPts val="0"/>
+              </a:spcAft>
+            </a:pPr>
+            <a:r>
+              <a:rPr sz="1050" b="0" i="0">
+                <a:solidFill>
+                  <a:srgbClr val="B4C7D2"/>
+                </a:solidFill>
+                <a:latin typeface="Arial"/>
+              </a:rPr>
+              <a:t>4</a:t>
+            </a:r>
+          </a:p>
+        </p:txBody>
+      </p:sp>
+      <p:cxnSp>
+        <p:nvCxnSpPr>
+          <p:cNvPr id="11" name="A-E04 line 9" descr="sci-ppt:o009"/>
+          <p:cNvCxnSpPr/>
+          <p:nvPr/>
+        </p:nvCxnSpPr>
+        <p:spPr>
+          <a:xfrm>
+            <a:off x="4023360" y="4846320"/>
+            <a:ext cx="0" cy="64008"/>
+          </a:xfrm>
+          <a:prstGeom prst="line">
+            <a:avLst/>
+          </a:prstGeom>
+          <a:ln w="12700">
+            <a:solidFill>
+              <a:srgbClr val="B4C7D2"/>
+            </a:solidFill>
+          </a:ln>
+          <a:effectLst/>
+        </p:spPr>
+      </p:cxnSp>
+      <p:cxnSp>
+        <p:nvCxnSpPr>
+          <p:cNvPr id="12" name="A-E04 line 10" descr="sci-ppt:o010"/>
+          <p:cNvCxnSpPr/>
+          <p:nvPr/>
+        </p:nvCxnSpPr>
+        <p:spPr>
+          <a:xfrm>
+            <a:off x="4023360" y="1371600"/>
+            <a:ext cx="0" cy="3474720"/>
+          </a:xfrm>
+          <a:prstGeom prst="line">
+            <a:avLst/>
+          </a:prstGeom>
+          <a:ln w="7620">
+            <a:solidFill>
+              <a:srgbClr val="2E4756"/>
+            </a:solidFill>
+          </a:ln>
+          <a:effectLst/>
+        </p:spPr>
+      </p:cxnSp>
+      <p:sp>
+        <p:nvSpPr>
+          <p:cNvPr id="13" name="A-E04 text 11" descr="sci-ppt:o011"/>
+          <p:cNvSpPr txBox="1"/>
+          <p:nvPr/>
+        </p:nvSpPr>
+        <p:spPr>
+          <a:xfrm>
+            <a:off x="3566160" y="4928616"/>
+            <a:ext cx="914400" cy="208407"/>
+          </a:xfrm>
+          <a:prstGeom prst="rect">
+            <a:avLst/>
+          </a:prstGeom>
+          <a:noFill/>
+          <a:effectLst/>
+        </p:spPr>
+        <p:txBody>
+          <a:bodyPr wrap="none" lIns="18288" rIns="18288" tIns="18288" bIns="18288" anchor="t">
+            <a:spAutoFit/>
+          </a:bodyPr>
+          <a:lstStyle/>
+          <a:p>
+            <a:pPr algn="ctr">
+              <a:spcAft>
+                <a:spcPts val="0"/>
+              </a:spcAft>
+            </a:pPr>
+            <a:r>
+              <a:rPr sz="1050" b="0" i="0">
+                <a:solidFill>
+                  <a:srgbClr val="B4C7D2"/>
+                </a:solidFill>
+                <a:latin typeface="Arial"/>
+              </a:rPr>
+              <a:t>8</a:t>
+            </a:r>
+          </a:p>
+        </p:txBody>
+      </p:sp>
+      <p:cxnSp>
+        <p:nvCxnSpPr>
+          <p:cNvPr id="14" name="A-E04 line 12" descr="sci-ppt:o012"/>
+          <p:cNvCxnSpPr/>
+          <p:nvPr/>
+        </p:nvCxnSpPr>
+        <p:spPr>
+          <a:xfrm>
+            <a:off x="850392" y="4846320"/>
+            <a:ext cx="64008" cy="0"/>
+          </a:xfrm>
+          <a:prstGeom prst="line">
+            <a:avLst/>
+          </a:prstGeom>
+          <a:ln w="12700">
+            <a:solidFill>
+              <a:srgbClr val="B4C7D2"/>
+            </a:solidFill>
+          </a:ln>
+          <a:effectLst/>
+        </p:spPr>
+      </p:cxnSp>
+      <p:cxnSp>
+        <p:nvCxnSpPr>
+          <p:cNvPr id="15" name="A-E04 line 13" descr="sci-ppt:o013"/>
+          <p:cNvCxnSpPr/>
+          <p:nvPr/>
+        </p:nvCxnSpPr>
+        <p:spPr>
+          <a:xfrm>
+            <a:off x="850392" y="3191691"/>
+            <a:ext cx="64008" cy="0"/>
+          </a:xfrm>
+          <a:prstGeom prst="line">
+            <a:avLst/>
+          </a:prstGeom>
+          <a:ln w="12700">
+            <a:solidFill>
+              <a:srgbClr val="B4C7D2"/>
+            </a:solidFill>
+          </a:ln>
+          <a:effectLst/>
+        </p:spPr>
+      </p:cxnSp>
+      <p:cxnSp>
+        <p:nvCxnSpPr>
+          <p:cNvPr id="16" name="A-E04 line 14" descr="sci-ppt:o014"/>
+          <p:cNvCxnSpPr/>
+          <p:nvPr/>
+        </p:nvCxnSpPr>
+        <p:spPr>
+          <a:xfrm>
+            <a:off x="914400" y="3191691"/>
+            <a:ext cx="3108960" cy="0"/>
+          </a:xfrm>
+          <a:prstGeom prst="line">
+            <a:avLst/>
+          </a:prstGeom>
+          <a:ln w="7620">
+            <a:solidFill>
+              <a:srgbClr val="2E4756"/>
+            </a:solidFill>
+          </a:ln>
+          <a:effectLst/>
+        </p:spPr>
+      </p:cxnSp>
+      <p:sp>
+        <p:nvSpPr>
+          <p:cNvPr id="17" name="A-E04 text 15" descr="sci-ppt:o015"/>
+          <p:cNvSpPr txBox="1"/>
+          <p:nvPr/>
+        </p:nvSpPr>
+        <p:spPr>
+          <a:xfrm>
+            <a:off x="45720" y="3109395"/>
+            <a:ext cx="777240" cy="208407"/>
+          </a:xfrm>
+          <a:prstGeom prst="rect">
+            <a:avLst/>
+          </a:prstGeom>
+          <a:noFill/>
+          <a:effectLst/>
+        </p:spPr>
+        <p:txBody>
+          <a:bodyPr wrap="none" lIns="18288" rIns="18288" tIns="18288" bIns="18288" anchor="t">
+            <a:spAutoFit/>
+          </a:bodyPr>
+          <a:lstStyle/>
+          <a:p>
+            <a:pPr algn="r">
+              <a:spcAft>
+                <a:spcPts val="0"/>
+              </a:spcAft>
+            </a:pPr>
+            <a:r>
+              <a:rPr sz="1050" b="0" i="0">
+                <a:solidFill>
+                  <a:srgbClr val="B4C7D2"/>
+                </a:solidFill>
+                <a:latin typeface="Arial"/>
+              </a:rPr>
+              <a:t>0.5</a:t>
+            </a:r>
+          </a:p>
+        </p:txBody>
+      </p:sp>
+      <p:cxnSp>
+        <p:nvCxnSpPr>
+          <p:cNvPr id="18" name="A-E04 line 16" descr="sci-ppt:o016"/>
+          <p:cNvCxnSpPr/>
+          <p:nvPr/>
+        </p:nvCxnSpPr>
+        <p:spPr>
+          <a:xfrm>
+            <a:off x="850392" y="1537062"/>
+            <a:ext cx="64008" cy="0"/>
+          </a:xfrm>
+          <a:prstGeom prst="line">
+            <a:avLst/>
+          </a:prstGeom>
+          <a:ln w="12700">
+            <a:solidFill>
+              <a:srgbClr val="B4C7D2"/>
+            </a:solidFill>
+          </a:ln>
+          <a:effectLst/>
+        </p:spPr>
+      </p:cxnSp>
+      <p:cxnSp>
+        <p:nvCxnSpPr>
+          <p:cNvPr id="19" name="A-E04 line 17" descr="sci-ppt:o017"/>
+          <p:cNvCxnSpPr/>
+          <p:nvPr/>
+        </p:nvCxnSpPr>
+        <p:spPr>
+          <a:xfrm>
+            <a:off x="914400" y="1537062"/>
+            <a:ext cx="3108960" cy="0"/>
+          </a:xfrm>
+          <a:prstGeom prst="line">
+            <a:avLst/>
+          </a:prstGeom>
+          <a:ln w="7620">
+            <a:solidFill>
+              <a:srgbClr val="2E4756"/>
+            </a:solidFill>
+          </a:ln>
+          <a:effectLst/>
+        </p:spPr>
+      </p:cxnSp>
+      <p:sp>
+        <p:nvSpPr>
+          <p:cNvPr id="20" name="A-E04 text 18" descr="sci-ppt:o018"/>
+          <p:cNvSpPr txBox="1"/>
+          <p:nvPr/>
+        </p:nvSpPr>
+        <p:spPr>
+          <a:xfrm>
+            <a:off x="45720" y="1454766"/>
+            <a:ext cx="777240" cy="208407"/>
+          </a:xfrm>
+          <a:prstGeom prst="rect">
+            <a:avLst/>
+          </a:prstGeom>
+          <a:noFill/>
+          <a:effectLst/>
+        </p:spPr>
+        <p:txBody>
+          <a:bodyPr wrap="none" lIns="18288" rIns="18288" tIns="18288" bIns="18288" anchor="t">
+            <a:spAutoFit/>
+          </a:bodyPr>
+          <a:lstStyle/>
+          <a:p>
+            <a:pPr algn="r">
+              <a:spcAft>
+                <a:spcPts val="0"/>
+              </a:spcAft>
+            </a:pPr>
+            <a:r>
+              <a:rPr sz="1050" b="0" i="0">
+                <a:solidFill>
+                  <a:srgbClr val="B4C7D2"/>
+                </a:solidFill>
+                <a:latin typeface="Arial"/>
+              </a:rPr>
+              <a:t>1.0</a:t>
+            </a:r>
+          </a:p>
+        </p:txBody>
+      </p:sp>
+      <p:sp>
+        <p:nvSpPr>
+          <p:cNvPr id="21" name="A-E04 text 19" descr="sci-ppt:o019"/>
+          <p:cNvSpPr txBox="1"/>
+          <p:nvPr/>
+        </p:nvSpPr>
+        <p:spPr>
+          <a:xfrm>
+            <a:off x="914400" y="5129783"/>
+            <a:ext cx="3108960" cy="231648"/>
+          </a:xfrm>
+          <a:prstGeom prst="rect">
+            <a:avLst/>
+          </a:prstGeom>
+          <a:noFill/>
+          <a:effectLst/>
+        </p:spPr>
+        <p:txBody>
+          <a:bodyPr wrap="none" lIns="18288" rIns="18288" tIns="18288" bIns="18288" anchor="t">
+            <a:spAutoFit/>
+          </a:bodyPr>
+          <a:lstStyle/>
+          <a:p>
+            <a:pPr algn="ctr">
+              <a:spcAft>
+                <a:spcPts val="0"/>
+              </a:spcAft>
+            </a:pPr>
+            <a:r>
+              <a:rPr sz="1200" b="0" i="0">
+                <a:solidFill>
+                  <a:srgbClr val="E7F0F3"/>
+                </a:solidFill>
+                <a:latin typeface="Arial"/>
+              </a:rPr>
+              <a:t>r / R</a:t>
+            </a:r>
+          </a:p>
+        </p:txBody>
+      </p:sp>
+      <p:sp>
+        <p:nvSpPr>
+          <p:cNvPr id="22" name="A-E04 text 20" descr="sci-ppt:o020"/>
+          <p:cNvSpPr txBox="1"/>
+          <p:nvPr/>
+        </p:nvSpPr>
+        <p:spPr>
+          <a:xfrm>
+            <a:off x="365760" y="1024128"/>
+            <a:ext cx="3108960" cy="231648"/>
+          </a:xfrm>
+          <a:prstGeom prst="rect">
+            <a:avLst/>
+          </a:prstGeom>
+          <a:noFill/>
+          <a:effectLst/>
+        </p:spPr>
+        <p:txBody>
+          <a:bodyPr wrap="none" lIns="18288" rIns="18288" tIns="18288" bIns="18288" anchor="t">
+            <a:spAutoFit/>
+          </a:bodyPr>
+          <a:lstStyle/>
+          <a:p>
+            <a:pPr algn="l">
+              <a:spcAft>
+                <a:spcPts val="0"/>
+              </a:spcAft>
+            </a:pPr>
+            <a:r>
+              <a:rPr sz="1200" b="0" i="0">
+                <a:solidFill>
+                  <a:srgbClr val="E7F0F3"/>
+                </a:solidFill>
+                <a:latin typeface="Arial"/>
+              </a:rPr>
+              <a:t>q</a:t>
+            </a:r>
+          </a:p>
+        </p:txBody>
+      </p:sp>
+      <p:sp>
+        <p:nvSpPr>
+          <p:cNvPr id="23" name="A-E04 polygon 21" descr="sci-ppt:o021"/>
           <p:cNvSpPr/>
           <p:nvPr/>
         </p:nvSpPr>
         <p:spPr>
           <a:xfrm>
-            <a:off x="1463040" y="1316736"/>
-            <a:ext cx="658368" cy="658368"/>
+            <a:off x="914400" y="1539208"/>
+            <a:ext cx="3108960" cy="2755569"/>
+          </a:xfrm>
+          <a:custGeom>
+            <a:avLst/>
+            <a:gdLst/>
+            <a:ahLst/>
+            <a:cxnLst/>
+            <a:rect l="l" t="t" r="r" b="b"/>
+            <a:pathLst>
+              <a:path w="3108960" h="2755569">
+                <a:moveTo>
+                  <a:pt x="0" y="2755569"/>
+                </a:moveTo>
+                <a:lnTo>
+                  <a:pt x="20795" y="1620843"/>
+                </a:lnTo>
+                <a:lnTo>
+                  <a:pt x="41591" y="1253297"/>
+                </a:lnTo>
+                <a:lnTo>
+                  <a:pt x="62387" y="1022632"/>
+                </a:lnTo>
+                <a:lnTo>
+                  <a:pt x="83182" y="858150"/>
+                </a:lnTo>
+                <a:lnTo>
+                  <a:pt x="103978" y="733377"/>
+                </a:lnTo>
+                <a:lnTo>
+                  <a:pt x="124774" y="635097"/>
+                </a:lnTo>
+                <a:lnTo>
+                  <a:pt x="145570" y="555664"/>
+                </a:lnTo>
+                <a:lnTo>
+                  <a:pt x="166365" y="490228"/>
+                </a:lnTo>
+                <a:lnTo>
+                  <a:pt x="187161" y="435517"/>
+                </a:lnTo>
+                <a:lnTo>
+                  <a:pt x="207957" y="389222"/>
+                </a:lnTo>
+                <a:lnTo>
+                  <a:pt x="228752" y="349656"/>
+                </a:lnTo>
+                <a:lnTo>
+                  <a:pt x="249548" y="315554"/>
+                </a:lnTo>
+                <a:lnTo>
+                  <a:pt x="270344" y="285944"/>
+                </a:lnTo>
+                <a:lnTo>
+                  <a:pt x="291140" y="260070"/>
+                </a:lnTo>
+                <a:lnTo>
+                  <a:pt x="311935" y="237330"/>
+                </a:lnTo>
+                <a:lnTo>
+                  <a:pt x="332731" y="217242"/>
+                </a:lnTo>
+                <a:lnTo>
+                  <a:pt x="353527" y="199415"/>
+                </a:lnTo>
+                <a:lnTo>
+                  <a:pt x="374322" y="183527"/>
+                </a:lnTo>
+                <a:lnTo>
+                  <a:pt x="395118" y="169312"/>
+                </a:lnTo>
+                <a:lnTo>
+                  <a:pt x="415914" y="156550"/>
+                </a:lnTo>
+                <a:lnTo>
+                  <a:pt x="436710" y="145053"/>
+                </a:lnTo>
+                <a:lnTo>
+                  <a:pt x="457505" y="134665"/>
+                </a:lnTo>
+                <a:lnTo>
+                  <a:pt x="478301" y="125251"/>
+                </a:lnTo>
+                <a:lnTo>
+                  <a:pt x="499097" y="116698"/>
+                </a:lnTo>
+                <a:lnTo>
+                  <a:pt x="519892" y="108907"/>
+                </a:lnTo>
+                <a:lnTo>
+                  <a:pt x="540688" y="101793"/>
+                </a:lnTo>
+                <a:lnTo>
+                  <a:pt x="561484" y="95284"/>
+                </a:lnTo>
+                <a:lnTo>
+                  <a:pt x="582280" y="89314"/>
+                </a:lnTo>
+                <a:lnTo>
+                  <a:pt x="603075" y="83829"/>
+                </a:lnTo>
+                <a:lnTo>
+                  <a:pt x="623871" y="78780"/>
+                </a:lnTo>
+                <a:lnTo>
+                  <a:pt x="644667" y="74123"/>
+                </a:lnTo>
+                <a:lnTo>
+                  <a:pt x="665463" y="69820"/>
+                </a:lnTo>
+                <a:lnTo>
+                  <a:pt x="686258" y="65838"/>
+                </a:lnTo>
+                <a:lnTo>
+                  <a:pt x="707054" y="62148"/>
+                </a:lnTo>
+                <a:lnTo>
+                  <a:pt x="727850" y="58722"/>
+                </a:lnTo>
+                <a:lnTo>
+                  <a:pt x="748645" y="55538"/>
+                </a:lnTo>
+                <a:lnTo>
+                  <a:pt x="769441" y="52574"/>
+                </a:lnTo>
+                <a:lnTo>
+                  <a:pt x="790237" y="49811"/>
+                </a:lnTo>
+                <a:lnTo>
+                  <a:pt x="811033" y="47232"/>
+                </a:lnTo>
+                <a:lnTo>
+                  <a:pt x="831828" y="44823"/>
+                </a:lnTo>
+                <a:lnTo>
+                  <a:pt x="852624" y="42569"/>
+                </a:lnTo>
+                <a:lnTo>
+                  <a:pt x="873420" y="40457"/>
+                </a:lnTo>
+                <a:lnTo>
+                  <a:pt x="894215" y="38478"/>
+                </a:lnTo>
+                <a:lnTo>
+                  <a:pt x="915011" y="36620"/>
+                </a:lnTo>
+                <a:lnTo>
+                  <a:pt x="935807" y="34874"/>
+                </a:lnTo>
+                <a:lnTo>
+                  <a:pt x="956603" y="33232"/>
+                </a:lnTo>
+                <a:lnTo>
+                  <a:pt x="977398" y="31686"/>
+                </a:lnTo>
+                <a:lnTo>
+                  <a:pt x="998194" y="30229"/>
+                </a:lnTo>
+                <a:lnTo>
+                  <a:pt x="1018990" y="28855"/>
+                </a:lnTo>
+                <a:lnTo>
+                  <a:pt x="1039785" y="27558"/>
+                </a:lnTo>
+                <a:lnTo>
+                  <a:pt x="1060581" y="26333"/>
+                </a:lnTo>
+                <a:lnTo>
+                  <a:pt x="1081377" y="25175"/>
+                </a:lnTo>
+                <a:lnTo>
+                  <a:pt x="1102173" y="24079"/>
+                </a:lnTo>
+                <a:lnTo>
+                  <a:pt x="1122968" y="23040"/>
+                </a:lnTo>
+                <a:lnTo>
+                  <a:pt x="1143764" y="22057"/>
+                </a:lnTo>
+                <a:lnTo>
+                  <a:pt x="1164560" y="21123"/>
+                </a:lnTo>
+                <a:lnTo>
+                  <a:pt x="1185355" y="20238"/>
+                </a:lnTo>
+                <a:lnTo>
+                  <a:pt x="1206151" y="19397"/>
+                </a:lnTo>
+                <a:lnTo>
+                  <a:pt x="1226947" y="18598"/>
+                </a:lnTo>
+                <a:lnTo>
+                  <a:pt x="1247743" y="17837"/>
+                </a:lnTo>
+                <a:lnTo>
+                  <a:pt x="1268538" y="17114"/>
+                </a:lnTo>
+                <a:lnTo>
+                  <a:pt x="1289334" y="16425"/>
+                </a:lnTo>
+                <a:lnTo>
+                  <a:pt x="1310130" y="15769"/>
+                </a:lnTo>
+                <a:lnTo>
+                  <a:pt x="1330926" y="15144"/>
+                </a:lnTo>
+                <a:lnTo>
+                  <a:pt x="1351721" y="14547"/>
+                </a:lnTo>
+                <a:lnTo>
+                  <a:pt x="1372517" y="13977"/>
+                </a:lnTo>
+                <a:lnTo>
+                  <a:pt x="1393313" y="13434"/>
+                </a:lnTo>
+                <a:lnTo>
+                  <a:pt x="1414108" y="12914"/>
+                </a:lnTo>
+                <a:lnTo>
+                  <a:pt x="1434904" y="12417"/>
+                </a:lnTo>
+                <a:lnTo>
+                  <a:pt x="1455700" y="11942"/>
+                </a:lnTo>
+                <a:lnTo>
+                  <a:pt x="1476496" y="11488"/>
+                </a:lnTo>
+                <a:lnTo>
+                  <a:pt x="1497291" y="11053"/>
+                </a:lnTo>
+                <a:lnTo>
+                  <a:pt x="1518087" y="10636"/>
+                </a:lnTo>
+                <a:lnTo>
+                  <a:pt x="1538883" y="10236"/>
+                </a:lnTo>
+                <a:lnTo>
+                  <a:pt x="1559678" y="9853"/>
+                </a:lnTo>
+                <a:lnTo>
+                  <a:pt x="1580474" y="9486"/>
+                </a:lnTo>
+                <a:lnTo>
+                  <a:pt x="1601270" y="9134"/>
+                </a:lnTo>
+                <a:lnTo>
+                  <a:pt x="1622066" y="8796"/>
+                </a:lnTo>
+                <a:lnTo>
+                  <a:pt x="1642861" y="8471"/>
+                </a:lnTo>
+                <a:lnTo>
+                  <a:pt x="1663657" y="8159"/>
+                </a:lnTo>
+                <a:lnTo>
+                  <a:pt x="1684453" y="7859"/>
+                </a:lnTo>
+                <a:lnTo>
+                  <a:pt x="1705248" y="7570"/>
+                </a:lnTo>
+                <a:lnTo>
+                  <a:pt x="1726044" y="7293"/>
+                </a:lnTo>
+                <a:lnTo>
+                  <a:pt x="1746840" y="7026"/>
+                </a:lnTo>
+                <a:lnTo>
+                  <a:pt x="1767636" y="6769"/>
+                </a:lnTo>
+                <a:lnTo>
+                  <a:pt x="1788431" y="6521"/>
+                </a:lnTo>
+                <a:lnTo>
+                  <a:pt x="1809227" y="6283"/>
+                </a:lnTo>
+                <a:lnTo>
+                  <a:pt x="1830023" y="6053"/>
+                </a:lnTo>
+                <a:lnTo>
+                  <a:pt x="1850818" y="5832"/>
+                </a:lnTo>
+                <a:lnTo>
+                  <a:pt x="1871614" y="5618"/>
+                </a:lnTo>
+                <a:lnTo>
+                  <a:pt x="1892410" y="5412"/>
+                </a:lnTo>
+                <a:lnTo>
+                  <a:pt x="1913206" y="5214"/>
+                </a:lnTo>
+                <a:lnTo>
+                  <a:pt x="1934001" y="5022"/>
+                </a:lnTo>
+                <a:lnTo>
+                  <a:pt x="1954797" y="4837"/>
+                </a:lnTo>
+                <a:lnTo>
+                  <a:pt x="1975593" y="4658"/>
+                </a:lnTo>
+                <a:lnTo>
+                  <a:pt x="1996389" y="4485"/>
+                </a:lnTo>
+                <a:lnTo>
+                  <a:pt x="2017184" y="4318"/>
+                </a:lnTo>
+                <a:lnTo>
+                  <a:pt x="2037980" y="4157"/>
+                </a:lnTo>
+                <a:lnTo>
+                  <a:pt x="2058776" y="4001"/>
+                </a:lnTo>
+                <a:lnTo>
+                  <a:pt x="2079571" y="3850"/>
+                </a:lnTo>
+                <a:lnTo>
+                  <a:pt x="2100367" y="3704"/>
+                </a:lnTo>
+                <a:lnTo>
+                  <a:pt x="2121163" y="3562"/>
+                </a:lnTo>
+                <a:lnTo>
+                  <a:pt x="2141959" y="3425"/>
+                </a:lnTo>
+                <a:lnTo>
+                  <a:pt x="2162754" y="3293"/>
+                </a:lnTo>
+                <a:lnTo>
+                  <a:pt x="2183550" y="3165"/>
+                </a:lnTo>
+                <a:lnTo>
+                  <a:pt x="2204346" y="3040"/>
+                </a:lnTo>
+                <a:lnTo>
+                  <a:pt x="2225141" y="2920"/>
+                </a:lnTo>
+                <a:lnTo>
+                  <a:pt x="2245937" y="2803"/>
+                </a:lnTo>
+                <a:lnTo>
+                  <a:pt x="2266733" y="2690"/>
+                </a:lnTo>
+                <a:lnTo>
+                  <a:pt x="2287529" y="2580"/>
+                </a:lnTo>
+                <a:lnTo>
+                  <a:pt x="2308324" y="2474"/>
+                </a:lnTo>
+                <a:lnTo>
+                  <a:pt x="2329120" y="2370"/>
+                </a:lnTo>
+                <a:lnTo>
+                  <a:pt x="2349916" y="2270"/>
+                </a:lnTo>
+                <a:lnTo>
+                  <a:pt x="2370711" y="2173"/>
+                </a:lnTo>
+                <a:lnTo>
+                  <a:pt x="2391507" y="2079"/>
+                </a:lnTo>
+                <a:lnTo>
+                  <a:pt x="2412303" y="1987"/>
+                </a:lnTo>
+                <a:lnTo>
+                  <a:pt x="2433099" y="1898"/>
+                </a:lnTo>
+                <a:lnTo>
+                  <a:pt x="2453894" y="1811"/>
+                </a:lnTo>
+                <a:lnTo>
+                  <a:pt x="2474690" y="1727"/>
+                </a:lnTo>
+                <a:lnTo>
+                  <a:pt x="2495486" y="1645"/>
+                </a:lnTo>
+                <a:lnTo>
+                  <a:pt x="2516282" y="1566"/>
+                </a:lnTo>
+                <a:lnTo>
+                  <a:pt x="2537077" y="1489"/>
+                </a:lnTo>
+                <a:lnTo>
+                  <a:pt x="2557873" y="1414"/>
+                </a:lnTo>
+                <a:lnTo>
+                  <a:pt x="2578669" y="1341"/>
+                </a:lnTo>
+                <a:lnTo>
+                  <a:pt x="2599464" y="1270"/>
+                </a:lnTo>
+                <a:lnTo>
+                  <a:pt x="2620260" y="1201"/>
+                </a:lnTo>
+                <a:lnTo>
+                  <a:pt x="2641056" y="1133"/>
+                </a:lnTo>
+                <a:lnTo>
+                  <a:pt x="2661852" y="1068"/>
+                </a:lnTo>
+                <a:lnTo>
+                  <a:pt x="2682647" y="1004"/>
+                </a:lnTo>
+                <a:lnTo>
+                  <a:pt x="2703443" y="942"/>
+                </a:lnTo>
+                <a:lnTo>
+                  <a:pt x="2724239" y="881"/>
+                </a:lnTo>
+                <a:lnTo>
+                  <a:pt x="2745034" y="823"/>
+                </a:lnTo>
+                <a:lnTo>
+                  <a:pt x="2765830" y="765"/>
+                </a:lnTo>
+                <a:lnTo>
+                  <a:pt x="2786626" y="709"/>
+                </a:lnTo>
+                <a:lnTo>
+                  <a:pt x="2807422" y="655"/>
+                </a:lnTo>
+                <a:lnTo>
+                  <a:pt x="2828217" y="602"/>
+                </a:lnTo>
+                <a:lnTo>
+                  <a:pt x="2849013" y="550"/>
+                </a:lnTo>
+                <a:lnTo>
+                  <a:pt x="2869809" y="500"/>
+                </a:lnTo>
+                <a:lnTo>
+                  <a:pt x="2890604" y="450"/>
+                </a:lnTo>
+                <a:lnTo>
+                  <a:pt x="2911400" y="402"/>
+                </a:lnTo>
+                <a:lnTo>
+                  <a:pt x="2932196" y="355"/>
+                </a:lnTo>
+                <a:lnTo>
+                  <a:pt x="2952992" y="310"/>
+                </a:lnTo>
+                <a:lnTo>
+                  <a:pt x="2973787" y="265"/>
+                </a:lnTo>
+                <a:lnTo>
+                  <a:pt x="2994583" y="222"/>
+                </a:lnTo>
+                <a:lnTo>
+                  <a:pt x="3015379" y="179"/>
+                </a:lnTo>
+                <a:lnTo>
+                  <a:pt x="3036174" y="138"/>
+                </a:lnTo>
+                <a:lnTo>
+                  <a:pt x="3056970" y="97"/>
+                </a:lnTo>
+                <a:lnTo>
+                  <a:pt x="3077766" y="58"/>
+                </a:lnTo>
+                <a:lnTo>
+                  <a:pt x="3098562" y="19"/>
+                </a:lnTo>
+                <a:lnTo>
+                  <a:pt x="3108960" y="0"/>
+                </a:lnTo>
+              </a:path>
+            </a:pathLst>
+          </a:custGeom>
+          <a:noFill/>
+          <a:ln w="38100">
+            <a:solidFill>
+              <a:srgbClr val="8EDBD4"/>
+            </a:solidFill>
+          </a:ln>
+          <a:effectLst/>
+        </p:spPr>
+        <p:txBody>
+          <a:bodyPr rtlCol="0" anchor="ctr"/>
+          <a:lstStyle/>
+          <a:p>
+            <a:pPr algn="ctr"/>
+          </a:p>
+        </p:txBody>
+      </p:sp>
+      <p:sp>
+        <p:nvSpPr>
+          <p:cNvPr id="24" name="A-E04 ellipse 22" descr="sci-ppt:o022"/>
+          <p:cNvSpPr/>
+          <p:nvPr/>
+        </p:nvSpPr>
+        <p:spPr>
+          <a:xfrm>
+            <a:off x="841248" y="4221625"/>
+            <a:ext cx="146304" cy="146304"/>
           </a:xfrm>
           <a:prstGeom prst="ellipse">
+            <a:avLst/>
+          </a:prstGeom>
+          <a:solidFill>
+            <a:srgbClr val="F2B880"/>
+          </a:solidFill>
+          <a:ln w="12700">
+            <a:solidFill>
+              <a:srgbClr val="F2B880"/>
+            </a:solidFill>
+          </a:ln>
+          <a:effectLst/>
+        </p:spPr>
+        <p:txBody>
+          <a:bodyPr rtlCol="0" anchor="ctr"/>
+          <a:lstStyle/>
+          <a:p>
+            <a:pPr algn="ctr"/>
+          </a:p>
+        </p:txBody>
+      </p:sp>
+      <p:sp>
+        <p:nvSpPr>
+          <p:cNvPr id="25" name="A-E04 text 23" descr="sci-ppt:o023"/>
+          <p:cNvSpPr txBox="1"/>
+          <p:nvPr/>
+        </p:nvSpPr>
+        <p:spPr>
+          <a:xfrm>
+            <a:off x="1097280" y="4020457"/>
+            <a:ext cx="1645920" cy="216153"/>
+          </a:xfrm>
+          <a:prstGeom prst="rect">
+            <a:avLst/>
+          </a:prstGeom>
+          <a:noFill/>
+          <a:effectLst/>
+        </p:spPr>
+        <p:txBody>
+          <a:bodyPr wrap="none" lIns="18288" rIns="18288" tIns="18288" bIns="18288" anchor="t">
+            <a:spAutoFit/>
+          </a:bodyPr>
+          <a:lstStyle/>
+          <a:p>
+            <a:pPr algn="l">
+              <a:spcAft>
+                <a:spcPts val="0"/>
+              </a:spcAft>
+            </a:pPr>
+            <a:r>
+              <a:rPr sz="1100" b="0" i="0">
+                <a:solidFill>
+                  <a:srgbClr val="F2B880"/>
+                </a:solidFill>
+                <a:latin typeface="Arial"/>
+              </a:rPr>
+              <a:t>q(R) = R_ref/R</a:t>
+            </a:r>
+          </a:p>
+        </p:txBody>
+      </p:sp>
+      <p:cxnSp>
+        <p:nvCxnSpPr>
+          <p:cNvPr id="26" name="A-E04 line 24" descr="sci-ppt:o024"/>
+          <p:cNvCxnSpPr/>
+          <p:nvPr/>
+        </p:nvCxnSpPr>
+        <p:spPr>
+          <a:xfrm>
+            <a:off x="914400" y="1537062"/>
+            <a:ext cx="3108960" cy="0"/>
+          </a:xfrm>
+          <a:prstGeom prst="line">
+            <a:avLst/>
+          </a:prstGeom>
+          <a:ln w="16510">
+            <a:solidFill>
+              <a:srgbClr val="B4C7D2"/>
+            </a:solidFill>
+            <a:prstDash val="dash"/>
+          </a:ln>
+          <a:effectLst/>
+        </p:spPr>
+      </p:cxnSp>
+      <p:cxnSp>
+        <p:nvCxnSpPr>
+          <p:cNvPr id="27" name="A-E04 line 25" descr="sci-ppt:o025"/>
+          <p:cNvCxnSpPr/>
+          <p:nvPr/>
+        </p:nvCxnSpPr>
+        <p:spPr>
+          <a:xfrm>
+            <a:off x="4937760" y="4846320"/>
+            <a:ext cx="2926080" cy="0"/>
+          </a:xfrm>
+          <a:prstGeom prst="line">
+            <a:avLst/>
+          </a:prstGeom>
+          <a:ln w="19050">
+            <a:solidFill>
+              <a:srgbClr val="B4C7D2"/>
+            </a:solidFill>
+          </a:ln>
+          <a:effectLst/>
+        </p:spPr>
+      </p:cxnSp>
+      <p:cxnSp>
+        <p:nvCxnSpPr>
+          <p:cNvPr id="28" name="A-E04 line 26" descr="sci-ppt:o026"/>
+          <p:cNvCxnSpPr/>
+          <p:nvPr/>
+        </p:nvCxnSpPr>
+        <p:spPr>
+          <a:xfrm>
+            <a:off x="4937760" y="1371600"/>
+            <a:ext cx="0" cy="3474720"/>
+          </a:xfrm>
+          <a:prstGeom prst="line">
+            <a:avLst/>
+          </a:prstGeom>
+          <a:ln w="19050">
+            <a:solidFill>
+              <a:srgbClr val="B4C7D2"/>
+            </a:solidFill>
+          </a:ln>
+          <a:effectLst/>
+        </p:spPr>
+      </p:cxnSp>
+      <p:cxnSp>
+        <p:nvCxnSpPr>
+          <p:cNvPr id="29" name="A-E04 line 27" descr="sci-ppt:o027"/>
+          <p:cNvCxnSpPr/>
+          <p:nvPr/>
+        </p:nvCxnSpPr>
+        <p:spPr>
+          <a:xfrm>
+            <a:off x="4937760" y="4846320"/>
+            <a:ext cx="0" cy="64008"/>
+          </a:xfrm>
+          <a:prstGeom prst="line">
+            <a:avLst/>
+          </a:prstGeom>
+          <a:ln w="12700">
+            <a:solidFill>
+              <a:srgbClr val="B4C7D2"/>
+            </a:solidFill>
+          </a:ln>
+          <a:effectLst/>
+        </p:spPr>
+      </p:cxnSp>
+      <p:cxnSp>
+        <p:nvCxnSpPr>
+          <p:cNvPr id="30" name="A-E04 line 28" descr="sci-ppt:o028"/>
+          <p:cNvCxnSpPr/>
+          <p:nvPr/>
+        </p:nvCxnSpPr>
+        <p:spPr>
+          <a:xfrm>
+            <a:off x="4937760" y="1371600"/>
+            <a:ext cx="0" cy="3474720"/>
+          </a:xfrm>
+          <a:prstGeom prst="line">
+            <a:avLst/>
+          </a:prstGeom>
+          <a:ln w="7620">
+            <a:solidFill>
+              <a:srgbClr val="2E4756"/>
+            </a:solidFill>
+          </a:ln>
+          <a:effectLst/>
+        </p:spPr>
+      </p:cxnSp>
+      <p:sp>
+        <p:nvSpPr>
+          <p:cNvPr id="31" name="A-E04 text 29" descr="sci-ppt:o029"/>
+          <p:cNvSpPr txBox="1"/>
+          <p:nvPr/>
+        </p:nvSpPr>
+        <p:spPr>
+          <a:xfrm>
+            <a:off x="4480560" y="4928616"/>
+            <a:ext cx="914400" cy="208407"/>
+          </a:xfrm>
+          <a:prstGeom prst="rect">
+            <a:avLst/>
+          </a:prstGeom>
+          <a:noFill/>
+          <a:effectLst/>
+        </p:spPr>
+        <p:txBody>
+          <a:bodyPr wrap="none" lIns="18288" rIns="18288" tIns="18288" bIns="18288" anchor="t">
+            <a:spAutoFit/>
+          </a:bodyPr>
+          <a:lstStyle/>
+          <a:p>
+            <a:pPr algn="ctr">
+              <a:spcAft>
+                <a:spcPts val="0"/>
+              </a:spcAft>
+            </a:pPr>
+            <a:r>
+              <a:rPr sz="1050" b="0" i="0">
+                <a:solidFill>
+                  <a:srgbClr val="B4C7D2"/>
+                </a:solidFill>
+                <a:latin typeface="Arial"/>
+              </a:rPr>
+              <a:t>0</a:t>
+            </a:r>
+          </a:p>
+        </p:txBody>
+      </p:sp>
+      <p:cxnSp>
+        <p:nvCxnSpPr>
+          <p:cNvPr id="32" name="A-E04 line 30" descr="sci-ppt:o030"/>
+          <p:cNvCxnSpPr/>
+          <p:nvPr/>
+        </p:nvCxnSpPr>
+        <p:spPr>
+          <a:xfrm>
+            <a:off x="6400800" y="4846320"/>
+            <a:ext cx="0" cy="64008"/>
+          </a:xfrm>
+          <a:prstGeom prst="line">
+            <a:avLst/>
+          </a:prstGeom>
+          <a:ln w="12700">
+            <a:solidFill>
+              <a:srgbClr val="B4C7D2"/>
+            </a:solidFill>
+          </a:ln>
+          <a:effectLst/>
+        </p:spPr>
+      </p:cxnSp>
+      <p:cxnSp>
+        <p:nvCxnSpPr>
+          <p:cNvPr id="33" name="A-E04 line 31" descr="sci-ppt:o031"/>
+          <p:cNvCxnSpPr/>
+          <p:nvPr/>
+        </p:nvCxnSpPr>
+        <p:spPr>
+          <a:xfrm>
+            <a:off x="6400800" y="1371600"/>
+            <a:ext cx="0" cy="3474720"/>
+          </a:xfrm>
+          <a:prstGeom prst="line">
+            <a:avLst/>
+          </a:prstGeom>
+          <a:ln w="7620">
+            <a:solidFill>
+              <a:srgbClr val="2E4756"/>
+            </a:solidFill>
+          </a:ln>
+          <a:effectLst/>
+        </p:spPr>
+      </p:cxnSp>
+      <p:sp>
+        <p:nvSpPr>
+          <p:cNvPr id="34" name="A-E04 text 32" descr="sci-ppt:o032"/>
+          <p:cNvSpPr txBox="1"/>
+          <p:nvPr/>
+        </p:nvSpPr>
+        <p:spPr>
+          <a:xfrm>
+            <a:off x="5943600" y="4928616"/>
+            <a:ext cx="914400" cy="208407"/>
+          </a:xfrm>
+          <a:prstGeom prst="rect">
+            <a:avLst/>
+          </a:prstGeom>
+          <a:noFill/>
+          <a:effectLst/>
+        </p:spPr>
+        <p:txBody>
+          <a:bodyPr wrap="none" lIns="18288" rIns="18288" tIns="18288" bIns="18288" anchor="t">
+            <a:spAutoFit/>
+          </a:bodyPr>
+          <a:lstStyle/>
+          <a:p>
+            <a:pPr algn="ctr">
+              <a:spcAft>
+                <a:spcPts val="0"/>
+              </a:spcAft>
+            </a:pPr>
+            <a:r>
+              <a:rPr sz="1050" b="0" i="0">
+                <a:solidFill>
+                  <a:srgbClr val="B4C7D2"/>
+                </a:solidFill>
+                <a:latin typeface="Arial"/>
+              </a:rPr>
+              <a:t>0.5</a:t>
+            </a:r>
+          </a:p>
+        </p:txBody>
+      </p:sp>
+      <p:cxnSp>
+        <p:nvCxnSpPr>
+          <p:cNvPr id="35" name="A-E04 line 33" descr="sci-ppt:o033"/>
+          <p:cNvCxnSpPr/>
+          <p:nvPr/>
+        </p:nvCxnSpPr>
+        <p:spPr>
+          <a:xfrm>
+            <a:off x="7863840" y="4846320"/>
+            <a:ext cx="0" cy="64008"/>
+          </a:xfrm>
+          <a:prstGeom prst="line">
+            <a:avLst/>
+          </a:prstGeom>
+          <a:ln w="12700">
+            <a:solidFill>
+              <a:srgbClr val="B4C7D2"/>
+            </a:solidFill>
+          </a:ln>
+          <a:effectLst/>
+        </p:spPr>
+      </p:cxnSp>
+      <p:cxnSp>
+        <p:nvCxnSpPr>
+          <p:cNvPr id="36" name="A-E04 line 34" descr="sci-ppt:o034"/>
+          <p:cNvCxnSpPr/>
+          <p:nvPr/>
+        </p:nvCxnSpPr>
+        <p:spPr>
+          <a:xfrm>
+            <a:off x="7863840" y="1371600"/>
+            <a:ext cx="0" cy="3474720"/>
+          </a:xfrm>
+          <a:prstGeom prst="line">
+            <a:avLst/>
+          </a:prstGeom>
+          <a:ln w="7620">
+            <a:solidFill>
+              <a:srgbClr val="2E4756"/>
+            </a:solidFill>
+          </a:ln>
+          <a:effectLst/>
+        </p:spPr>
+      </p:cxnSp>
+      <p:sp>
+        <p:nvSpPr>
+          <p:cNvPr id="37" name="A-E04 text 35" descr="sci-ppt:o035"/>
+          <p:cNvSpPr txBox="1"/>
+          <p:nvPr/>
+        </p:nvSpPr>
+        <p:spPr>
+          <a:xfrm>
+            <a:off x="7406640" y="4928616"/>
+            <a:ext cx="914400" cy="208407"/>
+          </a:xfrm>
+          <a:prstGeom prst="rect">
+            <a:avLst/>
+          </a:prstGeom>
+          <a:noFill/>
+          <a:effectLst/>
+        </p:spPr>
+        <p:txBody>
+          <a:bodyPr wrap="none" lIns="18288" rIns="18288" tIns="18288" bIns="18288" anchor="t">
+            <a:spAutoFit/>
+          </a:bodyPr>
+          <a:lstStyle/>
+          <a:p>
+            <a:pPr algn="ctr">
+              <a:spcAft>
+                <a:spcPts val="0"/>
+              </a:spcAft>
+            </a:pPr>
+            <a:r>
+              <a:rPr sz="1050" b="0" i="0">
+                <a:solidFill>
+                  <a:srgbClr val="B4C7D2"/>
+                </a:solidFill>
+                <a:latin typeface="Arial"/>
+              </a:rPr>
+              <a:t>1</a:t>
+            </a:r>
+          </a:p>
+        </p:txBody>
+      </p:sp>
+      <p:cxnSp>
+        <p:nvCxnSpPr>
+          <p:cNvPr id="38" name="A-E04 line 36" descr="sci-ppt:o036"/>
+          <p:cNvCxnSpPr/>
+          <p:nvPr/>
+        </p:nvCxnSpPr>
+        <p:spPr>
+          <a:xfrm>
+            <a:off x="4873752" y="4846320"/>
+            <a:ext cx="64008" cy="0"/>
+          </a:xfrm>
+          <a:prstGeom prst="line">
+            <a:avLst/>
+          </a:prstGeom>
+          <a:ln w="12700">
+            <a:solidFill>
+              <a:srgbClr val="B4C7D2"/>
+            </a:solidFill>
+          </a:ln>
+          <a:effectLst/>
+        </p:spPr>
+      </p:cxnSp>
+      <p:cxnSp>
+        <p:nvCxnSpPr>
+          <p:cNvPr id="39" name="A-E04 line 37" descr="sci-ppt:o037"/>
+          <p:cNvCxnSpPr/>
+          <p:nvPr/>
+        </p:nvCxnSpPr>
+        <p:spPr>
+          <a:xfrm>
+            <a:off x="4873752" y="3191691"/>
+            <a:ext cx="64008" cy="0"/>
+          </a:xfrm>
+          <a:prstGeom prst="line">
+            <a:avLst/>
+          </a:prstGeom>
+          <a:ln w="12700">
+            <a:solidFill>
+              <a:srgbClr val="B4C7D2"/>
+            </a:solidFill>
+          </a:ln>
+          <a:effectLst/>
+        </p:spPr>
+      </p:cxnSp>
+      <p:cxnSp>
+        <p:nvCxnSpPr>
+          <p:cNvPr id="40" name="A-E04 line 38" descr="sci-ppt:o038"/>
+          <p:cNvCxnSpPr/>
+          <p:nvPr/>
+        </p:nvCxnSpPr>
+        <p:spPr>
+          <a:xfrm>
+            <a:off x="4937760" y="3191691"/>
+            <a:ext cx="2926080" cy="0"/>
+          </a:xfrm>
+          <a:prstGeom prst="line">
+            <a:avLst/>
+          </a:prstGeom>
+          <a:ln w="7620">
+            <a:solidFill>
+              <a:srgbClr val="2E4756"/>
+            </a:solidFill>
+          </a:ln>
+          <a:effectLst/>
+        </p:spPr>
+      </p:cxnSp>
+      <p:sp>
+        <p:nvSpPr>
+          <p:cNvPr id="41" name="A-E04 text 39" descr="sci-ppt:o039"/>
+          <p:cNvSpPr txBox="1"/>
+          <p:nvPr/>
+        </p:nvSpPr>
+        <p:spPr>
+          <a:xfrm>
+            <a:off x="4069080" y="3109395"/>
+            <a:ext cx="777240" cy="208407"/>
+          </a:xfrm>
+          <a:prstGeom prst="rect">
+            <a:avLst/>
+          </a:prstGeom>
+          <a:noFill/>
+          <a:effectLst/>
+        </p:spPr>
+        <p:txBody>
+          <a:bodyPr wrap="none" lIns="18288" rIns="18288" tIns="18288" bIns="18288" anchor="t">
+            <a:spAutoFit/>
+          </a:bodyPr>
+          <a:lstStyle/>
+          <a:p>
+            <a:pPr algn="r">
+              <a:spcAft>
+                <a:spcPts val="0"/>
+              </a:spcAft>
+            </a:pPr>
+            <a:r>
+              <a:rPr sz="1050" b="0" i="0">
+                <a:solidFill>
+                  <a:srgbClr val="B4C7D2"/>
+                </a:solidFill>
+                <a:latin typeface="Arial"/>
+              </a:rPr>
+              <a:t>1</a:t>
+            </a:r>
+          </a:p>
+        </p:txBody>
+      </p:sp>
+      <p:cxnSp>
+        <p:nvCxnSpPr>
+          <p:cNvPr id="42" name="A-E04 line 40" descr="sci-ppt:o040"/>
+          <p:cNvCxnSpPr/>
+          <p:nvPr/>
+        </p:nvCxnSpPr>
+        <p:spPr>
+          <a:xfrm>
+            <a:off x="4873752" y="1537062"/>
+            <a:ext cx="64008" cy="0"/>
+          </a:xfrm>
+          <a:prstGeom prst="line">
+            <a:avLst/>
+          </a:prstGeom>
+          <a:ln w="12700">
+            <a:solidFill>
+              <a:srgbClr val="B4C7D2"/>
+            </a:solidFill>
+          </a:ln>
+          <a:effectLst/>
+        </p:spPr>
+      </p:cxnSp>
+      <p:cxnSp>
+        <p:nvCxnSpPr>
+          <p:cNvPr id="43" name="A-E04 line 41" descr="sci-ppt:o041"/>
+          <p:cNvCxnSpPr/>
+          <p:nvPr/>
+        </p:nvCxnSpPr>
+        <p:spPr>
+          <a:xfrm>
+            <a:off x="4937760" y="1537062"/>
+            <a:ext cx="2926080" cy="0"/>
+          </a:xfrm>
+          <a:prstGeom prst="line">
+            <a:avLst/>
+          </a:prstGeom>
+          <a:ln w="7620">
+            <a:solidFill>
+              <a:srgbClr val="2E4756"/>
+            </a:solidFill>
+          </a:ln>
+          <a:effectLst/>
+        </p:spPr>
+      </p:cxnSp>
+      <p:sp>
+        <p:nvSpPr>
+          <p:cNvPr id="44" name="A-E04 text 42" descr="sci-ppt:o042"/>
+          <p:cNvSpPr txBox="1"/>
+          <p:nvPr/>
+        </p:nvSpPr>
+        <p:spPr>
+          <a:xfrm>
+            <a:off x="4069080" y="1454766"/>
+            <a:ext cx="777240" cy="208407"/>
+          </a:xfrm>
+          <a:prstGeom prst="rect">
+            <a:avLst/>
+          </a:prstGeom>
+          <a:noFill/>
+          <a:effectLst/>
+        </p:spPr>
+        <p:txBody>
+          <a:bodyPr wrap="none" lIns="18288" rIns="18288" tIns="18288" bIns="18288" anchor="t">
+            <a:spAutoFit/>
+          </a:bodyPr>
+          <a:lstStyle/>
+          <a:p>
+            <a:pPr algn="r">
+              <a:spcAft>
+                <a:spcPts val="0"/>
+              </a:spcAft>
+            </a:pPr>
+            <a:r>
+              <a:rPr sz="1050" b="0" i="0">
+                <a:solidFill>
+                  <a:srgbClr val="B4C7D2"/>
+                </a:solidFill>
+                <a:latin typeface="Arial"/>
+              </a:rPr>
+              <a:t>2</a:t>
+            </a:r>
+          </a:p>
+        </p:txBody>
+      </p:sp>
+      <p:sp>
+        <p:nvSpPr>
+          <p:cNvPr id="45" name="A-E04 text 43" descr="sci-ppt:o043"/>
+          <p:cNvSpPr txBox="1"/>
+          <p:nvPr/>
+        </p:nvSpPr>
+        <p:spPr>
+          <a:xfrm>
+            <a:off x="4937760" y="5129783"/>
+            <a:ext cx="2926080" cy="231648"/>
+          </a:xfrm>
+          <a:prstGeom prst="rect">
+            <a:avLst/>
+          </a:prstGeom>
+          <a:noFill/>
+          <a:effectLst/>
+        </p:spPr>
+        <p:txBody>
+          <a:bodyPr wrap="none" lIns="18288" rIns="18288" tIns="18288" bIns="18288" anchor="t">
+            <a:spAutoFit/>
+          </a:bodyPr>
+          <a:lstStyle/>
+          <a:p>
+            <a:pPr algn="ctr">
+              <a:spcAft>
+                <a:spcPts val="0"/>
+              </a:spcAft>
+            </a:pPr>
+            <a:r>
+              <a:rPr sz="1200" b="0" i="0">
+                <a:solidFill>
+                  <a:srgbClr val="E7F0F3"/>
+                </a:solidFill>
+                <a:latin typeface="Arial"/>
+              </a:rPr>
+              <a:t>q</a:t>
+            </a:r>
+          </a:p>
+        </p:txBody>
+      </p:sp>
+      <p:sp>
+        <p:nvSpPr>
+          <p:cNvPr id="46" name="A-E04 text 44" descr="sci-ppt:o044"/>
+          <p:cNvSpPr txBox="1"/>
+          <p:nvPr/>
+        </p:nvSpPr>
+        <p:spPr>
+          <a:xfrm>
+            <a:off x="4389120" y="1024128"/>
+            <a:ext cx="2926080" cy="231648"/>
+          </a:xfrm>
+          <a:prstGeom prst="rect">
+            <a:avLst/>
+          </a:prstGeom>
+          <a:noFill/>
+          <a:effectLst/>
+        </p:spPr>
+        <p:txBody>
+          <a:bodyPr wrap="none" lIns="18288" rIns="18288" tIns="18288" bIns="18288" anchor="t">
+            <a:spAutoFit/>
+          </a:bodyPr>
+          <a:lstStyle/>
+          <a:p>
+            <a:pPr algn="l">
+              <a:spcAft>
+                <a:spcPts val="0"/>
+              </a:spcAft>
+            </a:pPr>
+            <a:r>
+              <a:rPr sz="1200" b="0" i="0">
+                <a:solidFill>
+                  <a:srgbClr val="E7F0F3"/>
+                </a:solidFill>
+                <a:latin typeface="Arial"/>
+              </a:rPr>
+              <a:t>integrand</a:t>
+            </a:r>
+          </a:p>
+        </p:txBody>
+      </p:sp>
+      <p:sp>
+        <p:nvSpPr>
+          <p:cNvPr id="47" name="A-E04 polygon 45" descr="sci-ppt:o045"/>
+          <p:cNvSpPr/>
+          <p:nvPr/>
+        </p:nvSpPr>
+        <p:spPr>
+          <a:xfrm>
+            <a:off x="5425440" y="1542021"/>
+            <a:ext cx="2435473" cy="3304299"/>
+          </a:xfrm>
+          <a:custGeom>
+            <a:avLst/>
+            <a:gdLst/>
+            <a:ahLst/>
+            <a:cxnLst/>
+            <a:rect l="l" t="t" r="r" b="b"/>
+            <a:pathLst>
+              <a:path w="2435473" h="3304299">
+                <a:moveTo>
+                  <a:pt x="0" y="1642010"/>
+                </a:moveTo>
+                <a:lnTo>
+                  <a:pt x="24600" y="1640791"/>
+                </a:lnTo>
+                <a:lnTo>
+                  <a:pt x="49201" y="1639449"/>
+                </a:lnTo>
+                <a:lnTo>
+                  <a:pt x="73802" y="1637979"/>
+                </a:lnTo>
+                <a:lnTo>
+                  <a:pt x="98402" y="1636374"/>
+                </a:lnTo>
+                <a:lnTo>
+                  <a:pt x="123003" y="1634628"/>
+                </a:lnTo>
+                <a:lnTo>
+                  <a:pt x="147604" y="1632736"/>
+                </a:lnTo>
+                <a:lnTo>
+                  <a:pt x="172205" y="1630692"/>
+                </a:lnTo>
+                <a:lnTo>
+                  <a:pt x="196805" y="1628489"/>
+                </a:lnTo>
+                <a:lnTo>
+                  <a:pt x="221406" y="1626123"/>
+                </a:lnTo>
+                <a:lnTo>
+                  <a:pt x="246007" y="1623586"/>
+                </a:lnTo>
+                <a:lnTo>
+                  <a:pt x="270608" y="1620873"/>
+                </a:lnTo>
+                <a:lnTo>
+                  <a:pt x="295208" y="1617978"/>
+                </a:lnTo>
+                <a:lnTo>
+                  <a:pt x="319809" y="1614896"/>
+                </a:lnTo>
+                <a:lnTo>
+                  <a:pt x="344410" y="1611620"/>
+                </a:lnTo>
+                <a:lnTo>
+                  <a:pt x="369011" y="1608144"/>
+                </a:lnTo>
+                <a:lnTo>
+                  <a:pt x="393611" y="1604463"/>
+                </a:lnTo>
+                <a:lnTo>
+                  <a:pt x="418212" y="1600571"/>
+                </a:lnTo>
+                <a:lnTo>
+                  <a:pt x="442813" y="1596461"/>
+                </a:lnTo>
+                <a:lnTo>
+                  <a:pt x="467414" y="1592129"/>
+                </a:lnTo>
+                <a:lnTo>
+                  <a:pt x="492014" y="1587567"/>
+                </a:lnTo>
+                <a:lnTo>
+                  <a:pt x="516615" y="1582770"/>
+                </a:lnTo>
+                <a:lnTo>
+                  <a:pt x="541216" y="1577732"/>
+                </a:lnTo>
+                <a:lnTo>
+                  <a:pt x="565817" y="1572448"/>
+                </a:lnTo>
+                <a:lnTo>
+                  <a:pt x="590417" y="1566911"/>
+                </a:lnTo>
+                <a:lnTo>
+                  <a:pt x="615018" y="1561115"/>
+                </a:lnTo>
+                <a:lnTo>
+                  <a:pt x="639619" y="1555055"/>
+                </a:lnTo>
+                <a:lnTo>
+                  <a:pt x="664220" y="1548725"/>
+                </a:lnTo>
+                <a:lnTo>
+                  <a:pt x="688820" y="1542118"/>
+                </a:lnTo>
+                <a:lnTo>
+                  <a:pt x="713421" y="1535229"/>
+                </a:lnTo>
+                <a:lnTo>
+                  <a:pt x="738022" y="1528052"/>
+                </a:lnTo>
+                <a:lnTo>
+                  <a:pt x="762623" y="1520581"/>
+                </a:lnTo>
+                <a:lnTo>
+                  <a:pt x="787223" y="1512811"/>
+                </a:lnTo>
+                <a:lnTo>
+                  <a:pt x="811824" y="1504734"/>
+                </a:lnTo>
+                <a:lnTo>
+                  <a:pt x="836425" y="1496346"/>
+                </a:lnTo>
+                <a:lnTo>
+                  <a:pt x="861026" y="1487640"/>
+                </a:lnTo>
+                <a:lnTo>
+                  <a:pt x="885626" y="1478611"/>
+                </a:lnTo>
+                <a:lnTo>
+                  <a:pt x="910227" y="1469253"/>
+                </a:lnTo>
+                <a:lnTo>
+                  <a:pt x="934828" y="1459559"/>
+                </a:lnTo>
+                <a:lnTo>
+                  <a:pt x="959429" y="1449524"/>
+                </a:lnTo>
+                <a:lnTo>
+                  <a:pt x="984029" y="1439143"/>
+                </a:lnTo>
+                <a:lnTo>
+                  <a:pt x="1008630" y="1428408"/>
+                </a:lnTo>
+                <a:lnTo>
+                  <a:pt x="1033231" y="1417314"/>
+                </a:lnTo>
+                <a:lnTo>
+                  <a:pt x="1057832" y="1405856"/>
+                </a:lnTo>
+                <a:lnTo>
+                  <a:pt x="1082432" y="1394027"/>
+                </a:lnTo>
+                <a:lnTo>
+                  <a:pt x="1107033" y="1381821"/>
+                </a:lnTo>
+                <a:lnTo>
+                  <a:pt x="1131634" y="1369233"/>
+                </a:lnTo>
+                <a:lnTo>
+                  <a:pt x="1156235" y="1356256"/>
+                </a:lnTo>
+                <a:lnTo>
+                  <a:pt x="1180835" y="1342886"/>
+                </a:lnTo>
+                <a:lnTo>
+                  <a:pt x="1205436" y="1329115"/>
+                </a:lnTo>
+                <a:lnTo>
+                  <a:pt x="1230037" y="1314938"/>
+                </a:lnTo>
+                <a:lnTo>
+                  <a:pt x="1254638" y="1300349"/>
+                </a:lnTo>
+                <a:lnTo>
+                  <a:pt x="1279238" y="1285343"/>
+                </a:lnTo>
+                <a:lnTo>
+                  <a:pt x="1303839" y="1269912"/>
+                </a:lnTo>
+                <a:lnTo>
+                  <a:pt x="1328440" y="1254052"/>
+                </a:lnTo>
+                <a:lnTo>
+                  <a:pt x="1353041" y="1237757"/>
+                </a:lnTo>
+                <a:lnTo>
+                  <a:pt x="1377641" y="1221020"/>
+                </a:lnTo>
+                <a:lnTo>
+                  <a:pt x="1402242" y="1203835"/>
+                </a:lnTo>
+                <a:lnTo>
+                  <a:pt x="1426843" y="1186197"/>
+                </a:lnTo>
+                <a:lnTo>
+                  <a:pt x="1451444" y="1168101"/>
+                </a:lnTo>
+                <a:lnTo>
+                  <a:pt x="1476044" y="1149539"/>
+                </a:lnTo>
+                <a:lnTo>
+                  <a:pt x="1500645" y="1130506"/>
+                </a:lnTo>
+                <a:lnTo>
+                  <a:pt x="1525246" y="1110997"/>
+                </a:lnTo>
+                <a:lnTo>
+                  <a:pt x="1549847" y="1091004"/>
+                </a:lnTo>
+                <a:lnTo>
+                  <a:pt x="1574447" y="1070523"/>
+                </a:lnTo>
+                <a:lnTo>
+                  <a:pt x="1599048" y="1049548"/>
+                </a:lnTo>
+                <a:lnTo>
+                  <a:pt x="1623649" y="1028072"/>
+                </a:lnTo>
+                <a:lnTo>
+                  <a:pt x="1648250" y="1006089"/>
+                </a:lnTo>
+                <a:lnTo>
+                  <a:pt x="1672850" y="983595"/>
+                </a:lnTo>
+                <a:lnTo>
+                  <a:pt x="1697451" y="960582"/>
+                </a:lnTo>
+                <a:lnTo>
+                  <a:pt x="1722052" y="937045"/>
+                </a:lnTo>
+                <a:lnTo>
+                  <a:pt x="1746653" y="912978"/>
+                </a:lnTo>
+                <a:lnTo>
+                  <a:pt x="1771253" y="888376"/>
+                </a:lnTo>
+                <a:lnTo>
+                  <a:pt x="1795854" y="863232"/>
+                </a:lnTo>
+                <a:lnTo>
+                  <a:pt x="1820455" y="837540"/>
+                </a:lnTo>
+                <a:lnTo>
+                  <a:pt x="1845056" y="811294"/>
+                </a:lnTo>
+                <a:lnTo>
+                  <a:pt x="1869656" y="784489"/>
+                </a:lnTo>
+                <a:lnTo>
+                  <a:pt x="1894257" y="757119"/>
+                </a:lnTo>
+                <a:lnTo>
+                  <a:pt x="1918858" y="729177"/>
+                </a:lnTo>
+                <a:lnTo>
+                  <a:pt x="1943458" y="700659"/>
+                </a:lnTo>
+                <a:lnTo>
+                  <a:pt x="1968059" y="671557"/>
+                </a:lnTo>
+                <a:lnTo>
+                  <a:pt x="1992660" y="641866"/>
+                </a:lnTo>
+                <a:lnTo>
+                  <a:pt x="2017261" y="611581"/>
+                </a:lnTo>
+                <a:lnTo>
+                  <a:pt x="2041861" y="580695"/>
+                </a:lnTo>
+                <a:lnTo>
+                  <a:pt x="2066462" y="549202"/>
+                </a:lnTo>
+                <a:lnTo>
+                  <a:pt x="2091063" y="517097"/>
+                </a:lnTo>
+                <a:lnTo>
+                  <a:pt x="2115664" y="484373"/>
+                </a:lnTo>
+                <a:lnTo>
+                  <a:pt x="2140264" y="451025"/>
+                </a:lnTo>
+                <a:lnTo>
+                  <a:pt x="2164865" y="417046"/>
+                </a:lnTo>
+                <a:lnTo>
+                  <a:pt x="2189466" y="382432"/>
+                </a:lnTo>
+                <a:lnTo>
+                  <a:pt x="2214067" y="347175"/>
+                </a:lnTo>
+                <a:lnTo>
+                  <a:pt x="2238667" y="311270"/>
+                </a:lnTo>
+                <a:lnTo>
+                  <a:pt x="2263268" y="274712"/>
+                </a:lnTo>
+                <a:lnTo>
+                  <a:pt x="2287869" y="237494"/>
+                </a:lnTo>
+                <a:lnTo>
+                  <a:pt x="2312470" y="199610"/>
+                </a:lnTo>
+                <a:lnTo>
+                  <a:pt x="2337070" y="161055"/>
+                </a:lnTo>
+                <a:lnTo>
+                  <a:pt x="2361671" y="121822"/>
+                </a:lnTo>
+                <a:lnTo>
+                  <a:pt x="2386272" y="81906"/>
+                </a:lnTo>
+                <a:lnTo>
+                  <a:pt x="2410873" y="41301"/>
+                </a:lnTo>
+                <a:lnTo>
+                  <a:pt x="2435473" y="0"/>
+                </a:lnTo>
+                <a:lnTo>
+                  <a:pt x="2435473" y="3304299"/>
+                </a:lnTo>
+                <a:lnTo>
+                  <a:pt x="2410873" y="3304299"/>
+                </a:lnTo>
+                <a:lnTo>
+                  <a:pt x="2386272" y="3304299"/>
+                </a:lnTo>
+                <a:lnTo>
+                  <a:pt x="2361671" y="3304299"/>
+                </a:lnTo>
+                <a:lnTo>
+                  <a:pt x="2337070" y="3304299"/>
+                </a:lnTo>
+                <a:lnTo>
+                  <a:pt x="2312470" y="3304299"/>
+                </a:lnTo>
+                <a:lnTo>
+                  <a:pt x="2287869" y="3304299"/>
+                </a:lnTo>
+                <a:lnTo>
+                  <a:pt x="2263268" y="3304299"/>
+                </a:lnTo>
+                <a:lnTo>
+                  <a:pt x="2238667" y="3304299"/>
+                </a:lnTo>
+                <a:lnTo>
+                  <a:pt x="2214067" y="3304299"/>
+                </a:lnTo>
+                <a:lnTo>
+                  <a:pt x="2189466" y="3304299"/>
+                </a:lnTo>
+                <a:lnTo>
+                  <a:pt x="2164865" y="3304299"/>
+                </a:lnTo>
+                <a:lnTo>
+                  <a:pt x="2140264" y="3304299"/>
+                </a:lnTo>
+                <a:lnTo>
+                  <a:pt x="2115664" y="3304299"/>
+                </a:lnTo>
+                <a:lnTo>
+                  <a:pt x="2091063" y="3304299"/>
+                </a:lnTo>
+                <a:lnTo>
+                  <a:pt x="2066462" y="3304299"/>
+                </a:lnTo>
+                <a:lnTo>
+                  <a:pt x="2041861" y="3304299"/>
+                </a:lnTo>
+                <a:lnTo>
+                  <a:pt x="2017261" y="3304299"/>
+                </a:lnTo>
+                <a:lnTo>
+                  <a:pt x="1992660" y="3304299"/>
+                </a:lnTo>
+                <a:lnTo>
+                  <a:pt x="1968059" y="3304299"/>
+                </a:lnTo>
+                <a:lnTo>
+                  <a:pt x="1943458" y="3304299"/>
+                </a:lnTo>
+                <a:lnTo>
+                  <a:pt x="1918858" y="3304299"/>
+                </a:lnTo>
+                <a:lnTo>
+                  <a:pt x="1894257" y="3304299"/>
+                </a:lnTo>
+                <a:lnTo>
+                  <a:pt x="1869656" y="3304299"/>
+                </a:lnTo>
+                <a:lnTo>
+                  <a:pt x="1845056" y="3304299"/>
+                </a:lnTo>
+                <a:lnTo>
+                  <a:pt x="1820455" y="3304299"/>
+                </a:lnTo>
+                <a:lnTo>
+                  <a:pt x="1795854" y="3304299"/>
+                </a:lnTo>
+                <a:lnTo>
+                  <a:pt x="1771253" y="3304299"/>
+                </a:lnTo>
+                <a:lnTo>
+                  <a:pt x="1746653" y="3304299"/>
+                </a:lnTo>
+                <a:lnTo>
+                  <a:pt x="1722052" y="3304299"/>
+                </a:lnTo>
+                <a:lnTo>
+                  <a:pt x="1697451" y="3304299"/>
+                </a:lnTo>
+                <a:lnTo>
+                  <a:pt x="1672850" y="3304299"/>
+                </a:lnTo>
+                <a:lnTo>
+                  <a:pt x="1648250" y="3304299"/>
+                </a:lnTo>
+                <a:lnTo>
+                  <a:pt x="1623649" y="3304299"/>
+                </a:lnTo>
+                <a:lnTo>
+                  <a:pt x="1599048" y="3304299"/>
+                </a:lnTo>
+                <a:lnTo>
+                  <a:pt x="1574447" y="3304299"/>
+                </a:lnTo>
+                <a:lnTo>
+                  <a:pt x="1549847" y="3304299"/>
+                </a:lnTo>
+                <a:lnTo>
+                  <a:pt x="1525246" y="3304299"/>
+                </a:lnTo>
+                <a:lnTo>
+                  <a:pt x="1500645" y="3304299"/>
+                </a:lnTo>
+                <a:lnTo>
+                  <a:pt x="1476044" y="3304299"/>
+                </a:lnTo>
+                <a:lnTo>
+                  <a:pt x="1451444" y="3304299"/>
+                </a:lnTo>
+                <a:lnTo>
+                  <a:pt x="1426843" y="3304299"/>
+                </a:lnTo>
+                <a:lnTo>
+                  <a:pt x="1402242" y="3304299"/>
+                </a:lnTo>
+                <a:lnTo>
+                  <a:pt x="1377641" y="3304299"/>
+                </a:lnTo>
+                <a:lnTo>
+                  <a:pt x="1353041" y="3304299"/>
+                </a:lnTo>
+                <a:lnTo>
+                  <a:pt x="1328440" y="3304299"/>
+                </a:lnTo>
+                <a:lnTo>
+                  <a:pt x="1303839" y="3304299"/>
+                </a:lnTo>
+                <a:lnTo>
+                  <a:pt x="1279238" y="3304299"/>
+                </a:lnTo>
+                <a:lnTo>
+                  <a:pt x="1254638" y="3304299"/>
+                </a:lnTo>
+                <a:lnTo>
+                  <a:pt x="1230037" y="3304299"/>
+                </a:lnTo>
+                <a:lnTo>
+                  <a:pt x="1205436" y="3304299"/>
+                </a:lnTo>
+                <a:lnTo>
+                  <a:pt x="1180835" y="3304299"/>
+                </a:lnTo>
+                <a:lnTo>
+                  <a:pt x="1156235" y="3304299"/>
+                </a:lnTo>
+                <a:lnTo>
+                  <a:pt x="1131634" y="3304299"/>
+                </a:lnTo>
+                <a:lnTo>
+                  <a:pt x="1107033" y="3304299"/>
+                </a:lnTo>
+                <a:lnTo>
+                  <a:pt x="1082432" y="3304299"/>
+                </a:lnTo>
+                <a:lnTo>
+                  <a:pt x="1057832" y="3304299"/>
+                </a:lnTo>
+                <a:lnTo>
+                  <a:pt x="1033231" y="3304299"/>
+                </a:lnTo>
+                <a:lnTo>
+                  <a:pt x="1008630" y="3304299"/>
+                </a:lnTo>
+                <a:lnTo>
+                  <a:pt x="984029" y="3304299"/>
+                </a:lnTo>
+                <a:lnTo>
+                  <a:pt x="959429" y="3304299"/>
+                </a:lnTo>
+                <a:lnTo>
+                  <a:pt x="934828" y="3304299"/>
+                </a:lnTo>
+                <a:lnTo>
+                  <a:pt x="910227" y="3304299"/>
+                </a:lnTo>
+                <a:lnTo>
+                  <a:pt x="885626" y="3304299"/>
+                </a:lnTo>
+                <a:lnTo>
+                  <a:pt x="861026" y="3304299"/>
+                </a:lnTo>
+                <a:lnTo>
+                  <a:pt x="836425" y="3304299"/>
+                </a:lnTo>
+                <a:lnTo>
+                  <a:pt x="811824" y="3304299"/>
+                </a:lnTo>
+                <a:lnTo>
+                  <a:pt x="787223" y="3304299"/>
+                </a:lnTo>
+                <a:lnTo>
+                  <a:pt x="762623" y="3304299"/>
+                </a:lnTo>
+                <a:lnTo>
+                  <a:pt x="738022" y="3304299"/>
+                </a:lnTo>
+                <a:lnTo>
+                  <a:pt x="713421" y="3304299"/>
+                </a:lnTo>
+                <a:lnTo>
+                  <a:pt x="688820" y="3304299"/>
+                </a:lnTo>
+                <a:lnTo>
+                  <a:pt x="664220" y="3304299"/>
+                </a:lnTo>
+                <a:lnTo>
+                  <a:pt x="639619" y="3304299"/>
+                </a:lnTo>
+                <a:lnTo>
+                  <a:pt x="615018" y="3304299"/>
+                </a:lnTo>
+                <a:lnTo>
+                  <a:pt x="590417" y="3304299"/>
+                </a:lnTo>
+                <a:lnTo>
+                  <a:pt x="565817" y="3304299"/>
+                </a:lnTo>
+                <a:lnTo>
+                  <a:pt x="541216" y="3304299"/>
+                </a:lnTo>
+                <a:lnTo>
+                  <a:pt x="516615" y="3304299"/>
+                </a:lnTo>
+                <a:lnTo>
+                  <a:pt x="492014" y="3304299"/>
+                </a:lnTo>
+                <a:lnTo>
+                  <a:pt x="467414" y="3304299"/>
+                </a:lnTo>
+                <a:lnTo>
+                  <a:pt x="442813" y="3304299"/>
+                </a:lnTo>
+                <a:lnTo>
+                  <a:pt x="418212" y="3304299"/>
+                </a:lnTo>
+                <a:lnTo>
+                  <a:pt x="393611" y="3304299"/>
+                </a:lnTo>
+                <a:lnTo>
+                  <a:pt x="369011" y="3304299"/>
+                </a:lnTo>
+                <a:lnTo>
+                  <a:pt x="344410" y="3304299"/>
+                </a:lnTo>
+                <a:lnTo>
+                  <a:pt x="319809" y="3304299"/>
+                </a:lnTo>
+                <a:lnTo>
+                  <a:pt x="295208" y="3304299"/>
+                </a:lnTo>
+                <a:lnTo>
+                  <a:pt x="270608" y="3304299"/>
+                </a:lnTo>
+                <a:lnTo>
+                  <a:pt x="246007" y="3304299"/>
+                </a:lnTo>
+                <a:lnTo>
+                  <a:pt x="221406" y="3304299"/>
+                </a:lnTo>
+                <a:lnTo>
+                  <a:pt x="196805" y="3304299"/>
+                </a:lnTo>
+                <a:lnTo>
+                  <a:pt x="172205" y="3304299"/>
+                </a:lnTo>
+                <a:lnTo>
+                  <a:pt x="147604" y="3304299"/>
+                </a:lnTo>
+                <a:lnTo>
+                  <a:pt x="123003" y="3304299"/>
+                </a:lnTo>
+                <a:lnTo>
+                  <a:pt x="98402" y="3304299"/>
+                </a:lnTo>
+                <a:lnTo>
+                  <a:pt x="73802" y="3304299"/>
+                </a:lnTo>
+                <a:lnTo>
+                  <a:pt x="49201" y="3304299"/>
+                </a:lnTo>
+                <a:lnTo>
+                  <a:pt x="24600" y="3304299"/>
+                </a:lnTo>
+                <a:lnTo>
+                  <a:pt x="0" y="3304299"/>
+                </a:lnTo>
+                <a:close/>
+              </a:path>
+            </a:pathLst>
+          </a:custGeom>
+          <a:solidFill>
+            <a:srgbClr val="8EDBD4">
+              <a:alpha val="25000"/>
+            </a:srgbClr>
+          </a:solidFill>
+          <a:ln w="10160">
+            <a:solidFill>
+              <a:srgbClr val="8EDBD4">
+                <a:alpha val="25000"/>
+              </a:srgbClr>
+            </a:solidFill>
+          </a:ln>
+          <a:effectLst/>
+        </p:spPr>
+        <p:txBody>
+          <a:bodyPr rtlCol="0" anchor="ctr"/>
+          <a:lstStyle/>
+          <a:p>
+            <a:pPr algn="ctr"/>
+          </a:p>
+        </p:txBody>
+      </p:sp>
+      <p:sp>
+        <p:nvSpPr>
+          <p:cNvPr id="48" name="A-E04 polygon 46" descr="sci-ppt:o046"/>
+          <p:cNvSpPr/>
+          <p:nvPr/>
+        </p:nvSpPr>
+        <p:spPr>
+          <a:xfrm>
+            <a:off x="4937760" y="1537062"/>
+            <a:ext cx="2926080" cy="1654629"/>
+          </a:xfrm>
+          <a:custGeom>
+            <a:avLst/>
+            <a:gdLst/>
+            <a:ahLst/>
+            <a:cxnLst/>
+            <a:rect l="l" t="t" r="r" b="b"/>
+            <a:pathLst>
+              <a:path w="2926080" h="1654629">
+                <a:moveTo>
+                  <a:pt x="0" y="1654629"/>
+                </a:moveTo>
+                <a:lnTo>
+                  <a:pt x="29556" y="1654627"/>
+                </a:lnTo>
+                <a:lnTo>
+                  <a:pt x="59112" y="1654615"/>
+                </a:lnTo>
+                <a:lnTo>
+                  <a:pt x="88669" y="1654583"/>
+                </a:lnTo>
+                <a:lnTo>
+                  <a:pt x="118225" y="1654520"/>
+                </a:lnTo>
+                <a:lnTo>
+                  <a:pt x="147781" y="1654416"/>
+                </a:lnTo>
+                <a:lnTo>
+                  <a:pt x="177338" y="1654261"/>
+                </a:lnTo>
+                <a:lnTo>
+                  <a:pt x="206894" y="1654044"/>
+                </a:lnTo>
+                <a:lnTo>
+                  <a:pt x="236450" y="1653756"/>
+                </a:lnTo>
+                <a:lnTo>
+                  <a:pt x="266007" y="1653386"/>
+                </a:lnTo>
+                <a:lnTo>
+                  <a:pt x="295563" y="1652924"/>
+                </a:lnTo>
+                <a:lnTo>
+                  <a:pt x="325120" y="1652359"/>
+                </a:lnTo>
+                <a:lnTo>
+                  <a:pt x="354676" y="1651682"/>
+                </a:lnTo>
+                <a:lnTo>
+                  <a:pt x="384232" y="1650882"/>
+                </a:lnTo>
+                <a:lnTo>
+                  <a:pt x="413789" y="1649950"/>
+                </a:lnTo>
+                <a:lnTo>
+                  <a:pt x="443345" y="1648874"/>
+                </a:lnTo>
+                <a:lnTo>
+                  <a:pt x="472901" y="1647644"/>
+                </a:lnTo>
+                <a:lnTo>
+                  <a:pt x="502458" y="1646251"/>
+                </a:lnTo>
+                <a:lnTo>
+                  <a:pt x="532014" y="1644684"/>
+                </a:lnTo>
+                <a:lnTo>
+                  <a:pt x="561570" y="1642932"/>
+                </a:lnTo>
+                <a:lnTo>
+                  <a:pt x="591127" y="1640987"/>
+                </a:lnTo>
+                <a:lnTo>
+                  <a:pt x="620683" y="1638836"/>
+                </a:lnTo>
+                <a:lnTo>
+                  <a:pt x="650240" y="1636471"/>
+                </a:lnTo>
+                <a:lnTo>
+                  <a:pt x="679796" y="1633881"/>
+                </a:lnTo>
+                <a:lnTo>
+                  <a:pt x="709352" y="1631055"/>
+                </a:lnTo>
+                <a:lnTo>
+                  <a:pt x="738909" y="1627984"/>
+                </a:lnTo>
+                <a:lnTo>
+                  <a:pt x="768465" y="1624657"/>
+                </a:lnTo>
+                <a:lnTo>
+                  <a:pt x="798021" y="1621064"/>
+                </a:lnTo>
+                <a:lnTo>
+                  <a:pt x="827578" y="1617195"/>
+                </a:lnTo>
+                <a:lnTo>
+                  <a:pt x="857134" y="1613039"/>
+                </a:lnTo>
+                <a:lnTo>
+                  <a:pt x="886690" y="1608586"/>
+                </a:lnTo>
+                <a:lnTo>
+                  <a:pt x="916247" y="1603827"/>
+                </a:lnTo>
+                <a:lnTo>
+                  <a:pt x="945803" y="1598750"/>
+                </a:lnTo>
+                <a:lnTo>
+                  <a:pt x="975360" y="1593346"/>
+                </a:lnTo>
+                <a:lnTo>
+                  <a:pt x="1004916" y="1587605"/>
+                </a:lnTo>
+                <a:lnTo>
+                  <a:pt x="1034472" y="1581515"/>
+                </a:lnTo>
+                <a:lnTo>
+                  <a:pt x="1064029" y="1575068"/>
+                </a:lnTo>
+                <a:lnTo>
+                  <a:pt x="1093585" y="1568252"/>
+                </a:lnTo>
+                <a:lnTo>
+                  <a:pt x="1123141" y="1561057"/>
+                </a:lnTo>
+                <a:lnTo>
+                  <a:pt x="1152698" y="1553474"/>
+                </a:lnTo>
+                <a:lnTo>
+                  <a:pt x="1182254" y="1545491"/>
+                </a:lnTo>
+                <a:lnTo>
+                  <a:pt x="1211810" y="1537100"/>
+                </a:lnTo>
+                <a:lnTo>
+                  <a:pt x="1241367" y="1528288"/>
+                </a:lnTo>
+                <a:lnTo>
+                  <a:pt x="1270923" y="1519047"/>
+                </a:lnTo>
+                <a:lnTo>
+                  <a:pt x="1300480" y="1509367"/>
+                </a:lnTo>
+                <a:lnTo>
+                  <a:pt x="1330036" y="1499236"/>
+                </a:lnTo>
+                <a:lnTo>
+                  <a:pt x="1359592" y="1488644"/>
+                </a:lnTo>
+                <a:lnTo>
+                  <a:pt x="1389149" y="1477582"/>
+                </a:lnTo>
+                <a:lnTo>
+                  <a:pt x="1418705" y="1466039"/>
+                </a:lnTo>
+                <a:lnTo>
+                  <a:pt x="1448261" y="1454005"/>
+                </a:lnTo>
+                <a:lnTo>
+                  <a:pt x="1477818" y="1441469"/>
+                </a:lnTo>
+                <a:lnTo>
+                  <a:pt x="1507374" y="1428422"/>
+                </a:lnTo>
+                <a:lnTo>
+                  <a:pt x="1536930" y="1414853"/>
+                </a:lnTo>
+                <a:lnTo>
+                  <a:pt x="1566487" y="1400752"/>
+                </a:lnTo>
+                <a:lnTo>
+                  <a:pt x="1596043" y="1386109"/>
+                </a:lnTo>
+                <a:lnTo>
+                  <a:pt x="1625600" y="1370913"/>
+                </a:lnTo>
+                <a:lnTo>
+                  <a:pt x="1655156" y="1355155"/>
+                </a:lnTo>
+                <a:lnTo>
+                  <a:pt x="1684712" y="1338824"/>
+                </a:lnTo>
+                <a:lnTo>
+                  <a:pt x="1714269" y="1321909"/>
+                </a:lnTo>
+                <a:lnTo>
+                  <a:pt x="1743825" y="1304401"/>
+                </a:lnTo>
+                <a:lnTo>
+                  <a:pt x="1773381" y="1286289"/>
+                </a:lnTo>
+                <a:lnTo>
+                  <a:pt x="1802938" y="1267563"/>
+                </a:lnTo>
+                <a:lnTo>
+                  <a:pt x="1832494" y="1248214"/>
+                </a:lnTo>
+                <a:lnTo>
+                  <a:pt x="1862050" y="1228230"/>
+                </a:lnTo>
+                <a:lnTo>
+                  <a:pt x="1891607" y="1207601"/>
+                </a:lnTo>
+                <a:lnTo>
+                  <a:pt x="1921163" y="1186317"/>
+                </a:lnTo>
+                <a:lnTo>
+                  <a:pt x="1950720" y="1164369"/>
+                </a:lnTo>
+                <a:lnTo>
+                  <a:pt x="1980276" y="1141745"/>
+                </a:lnTo>
+                <a:lnTo>
+                  <a:pt x="2009832" y="1118435"/>
+                </a:lnTo>
+                <a:lnTo>
+                  <a:pt x="2039389" y="1094430"/>
+                </a:lnTo>
+                <a:lnTo>
+                  <a:pt x="2068945" y="1069719"/>
+                </a:lnTo>
+                <a:lnTo>
+                  <a:pt x="2098501" y="1044292"/>
+                </a:lnTo>
+                <a:lnTo>
+                  <a:pt x="2128058" y="1018138"/>
+                </a:lnTo>
+                <a:lnTo>
+                  <a:pt x="2157614" y="991247"/>
+                </a:lnTo>
+                <a:lnTo>
+                  <a:pt x="2187170" y="963610"/>
+                </a:lnTo>
+                <a:lnTo>
+                  <a:pt x="2216727" y="935215"/>
+                </a:lnTo>
+                <a:lnTo>
+                  <a:pt x="2246283" y="906053"/>
+                </a:lnTo>
+                <a:lnTo>
+                  <a:pt x="2275840" y="876114"/>
+                </a:lnTo>
+                <a:lnTo>
+                  <a:pt x="2305396" y="845386"/>
+                </a:lnTo>
+                <a:lnTo>
+                  <a:pt x="2334952" y="813861"/>
+                </a:lnTo>
+                <a:lnTo>
+                  <a:pt x="2364509" y="781527"/>
+                </a:lnTo>
+                <a:lnTo>
+                  <a:pt x="2394065" y="748375"/>
+                </a:lnTo>
+                <a:lnTo>
+                  <a:pt x="2423621" y="714394"/>
+                </a:lnTo>
+                <a:lnTo>
+                  <a:pt x="2453178" y="679574"/>
+                </a:lnTo>
+                <a:lnTo>
+                  <a:pt x="2482734" y="643904"/>
+                </a:lnTo>
+                <a:lnTo>
+                  <a:pt x="2512290" y="607376"/>
+                </a:lnTo>
+                <a:lnTo>
+                  <a:pt x="2541847" y="569977"/>
+                </a:lnTo>
+                <a:lnTo>
+                  <a:pt x="2571403" y="531699"/>
+                </a:lnTo>
+                <a:lnTo>
+                  <a:pt x="2600960" y="492530"/>
+                </a:lnTo>
+                <a:lnTo>
+                  <a:pt x="2630516" y="452462"/>
+                </a:lnTo>
+                <a:lnTo>
+                  <a:pt x="2660072" y="411482"/>
+                </a:lnTo>
+                <a:lnTo>
+                  <a:pt x="2689629" y="369582"/>
+                </a:lnTo>
+                <a:lnTo>
+                  <a:pt x="2719185" y="326750"/>
+                </a:lnTo>
+                <a:lnTo>
+                  <a:pt x="2748741" y="282977"/>
+                </a:lnTo>
+                <a:lnTo>
+                  <a:pt x="2778298" y="238253"/>
+                </a:lnTo>
+                <a:lnTo>
+                  <a:pt x="2807854" y="192567"/>
+                </a:lnTo>
+                <a:lnTo>
+                  <a:pt x="2837410" y="145909"/>
+                </a:lnTo>
+                <a:lnTo>
+                  <a:pt x="2866967" y="98269"/>
+                </a:lnTo>
+                <a:lnTo>
+                  <a:pt x="2896523" y="49636"/>
+                </a:lnTo>
+                <a:lnTo>
+                  <a:pt x="2926080" y="0"/>
+                </a:lnTo>
+              </a:path>
+            </a:pathLst>
+          </a:custGeom>
+          <a:noFill/>
+          <a:ln w="38100">
+            <a:solidFill>
+              <a:srgbClr val="8EDBD4"/>
+            </a:solidFill>
+          </a:ln>
+          <a:effectLst/>
+        </p:spPr>
+        <p:txBody>
+          <a:bodyPr rtlCol="0" anchor="ctr"/>
+          <a:lstStyle/>
+          <a:p>
+            <a:pPr algn="ctr"/>
+          </a:p>
+        </p:txBody>
+      </p:sp>
+      <p:sp>
+        <p:nvSpPr>
+          <p:cNvPr id="49" name="A-E04 text 47" descr="sci-ppt:o047"/>
+          <p:cNvSpPr txBox="1"/>
+          <p:nvPr/>
+        </p:nvSpPr>
+        <p:spPr>
+          <a:xfrm>
+            <a:off x="5157216" y="1776548"/>
+            <a:ext cx="1097280" cy="231648"/>
+          </a:xfrm>
+          <a:prstGeom prst="rect">
+            <a:avLst/>
+          </a:prstGeom>
+          <a:noFill/>
+          <a:effectLst/>
+        </p:spPr>
+        <p:txBody>
+          <a:bodyPr wrap="none" lIns="18288" rIns="18288" tIns="18288" bIns="18288" anchor="t">
+            <a:spAutoFit/>
+          </a:bodyPr>
+          <a:lstStyle/>
+          <a:p>
+            <a:pPr algn="l">
+              <a:spcAft>
+                <a:spcPts val="0"/>
+              </a:spcAft>
+            </a:pPr>
+            <a:r>
+              <a:rPr sz="1200" b="0" i="0">
+                <a:solidFill>
+                  <a:srgbClr val="8EDBD4"/>
+                </a:solidFill>
+                <a:latin typeface="Arial"/>
+              </a:rPr>
+              <a:t>(1 + q³)</a:t>
+            </a:r>
+          </a:p>
+        </p:txBody>
+      </p:sp>
+      <p:sp>
+        <p:nvSpPr>
+          <p:cNvPr id="50" name="A-E04 round_rect 48" descr="sci-ppt:o048"/>
+          <p:cNvSpPr/>
+          <p:nvPr/>
+        </p:nvSpPr>
+        <p:spPr>
+          <a:xfrm>
+            <a:off x="8229600" y="1371600"/>
+            <a:ext cx="3611880" cy="3474720"/>
+          </a:xfrm>
+          <a:prstGeom prst="roundRect">
             <a:avLst/>
           </a:prstGeom>
           <a:solidFill>
             <a:srgbClr val="213E4B"/>
           </a:solidFill>
-          <a:ln w="17780">
+          <a:ln w="20320">
             <a:solidFill>
-              <a:srgbClr val="B4C7D2"/>
+              <a:srgbClr val="8EDBD4"/>
             </a:solidFill>
           </a:ln>
           <a:effectLst/>
@@ -3198,40 +5909,16 @@
           </a:p>
         </p:txBody>
       </p:sp>
-      <p:cxnSp>
-        <p:nvCxnSpPr>
-          <p:cNvPr id="5" name="arrow 3" descr="sci-ppt:obj-003"/>
-          <p:cNvCxnSpPr/>
-          <p:nvPr/>
-        </p:nvCxnSpPr>
-        <p:spPr>
-          <a:xfrm>
-            <a:off x="1792224" y="1645920"/>
-            <a:ext cx="329184" cy="0"/>
-          </a:xfrm>
-          <a:prstGeom prst="line">
-            <a:avLst/>
-          </a:prstGeom>
-          <a:ln w="21590">
-            <a:solidFill>
-              <a:srgbClr val="8EDBD4"/>
-            </a:solidFill>
-            <a:headEnd type="none" w="med" len="med"/>
-            <a:tailEnd type="triangle" w="med" len="med"/>
-          </a:ln>
-          <a:effectLst/>
-        </p:spPr>
-      </p:cxnSp>
-      <p:sp>
-        <p:nvSpPr>
-          <p:cNvPr id="6" name="text 4" descr="sci-ppt:obj-004"/>
+      <p:sp>
+        <p:nvSpPr>
+          <p:cNvPr id="51" name="A-E04 text 49" descr="sci-ppt:o049"/>
           <p:cNvSpPr txBox="1"/>
           <p:nvPr/>
         </p:nvSpPr>
         <p:spPr>
           <a:xfrm>
-            <a:off x="1755648" y="1271016"/>
-            <a:ext cx="1097280" cy="310896"/>
+            <a:off x="8339327" y="1426464"/>
+            <a:ext cx="3392424" cy="247142"/>
           </a:xfrm>
           <a:prstGeom prst="rect">
             <a:avLst/>
@@ -3240,7 +5927,7 @@
           <a:effectLst/>
         </p:spPr>
         <p:txBody>
-          <a:bodyPr wrap="none" lIns="0" rIns="0" tIns="0" bIns="0" anchor="ctr">
+          <a:bodyPr wrap="none" lIns="18288" rIns="18288" tIns="18288" bIns="18288" anchor="t">
             <a:spAutoFit/>
           </a:bodyPr>
           <a:lstStyle/>
@@ -3251,51 +5938,67 @@
               </a:spcAft>
             </a:pPr>
             <a:r>
-              <a:rPr sz="1296" b="0" i="0">
+              <a:rPr sz="1300" b="1" i="0">
+                <a:solidFill>
+                  <a:srgbClr val="8EDBD4"/>
+                </a:solidFill>
+                <a:latin typeface="Arial"/>
+              </a:rPr>
+              <a:t>Change of variable</a:t>
+            </a:r>
+          </a:p>
+        </p:txBody>
+      </p:sp>
+      <p:sp>
+        <p:nvSpPr>
+          <p:cNvPr id="52" name="A-E04 text 50" descr="sci-ppt:o050"/>
+          <p:cNvSpPr txBox="1"/>
+          <p:nvPr/>
+        </p:nvSpPr>
+        <p:spPr>
+          <a:xfrm>
+            <a:off x="8321040" y="1828800"/>
+            <a:ext cx="3429000" cy="216153"/>
+          </a:xfrm>
+          <a:prstGeom prst="rect">
+            <a:avLst/>
+          </a:prstGeom>
+          <a:noFill/>
+          <a:effectLst/>
+        </p:spPr>
+        <p:txBody>
+          <a:bodyPr wrap="none" lIns="18288" rIns="18288" tIns="18288" bIns="18288" anchor="t">
+            <a:spAutoFit/>
+          </a:bodyPr>
+          <a:lstStyle/>
+          <a:p>
+            <a:pPr algn="l">
+              <a:spcAft>
+                <a:spcPts val="0"/>
+              </a:spcAft>
+            </a:pPr>
+            <a:r>
+              <a:rPr sz="1100" b="1" i="0">
                 <a:solidFill>
                   <a:srgbClr val="E7F0F3"/>
                 </a:solidFill>
                 <a:latin typeface="Arial"/>
               </a:rPr>
-              <a:t>Rref</a:t>
-            </a:r>
-          </a:p>
-        </p:txBody>
-      </p:sp>
-      <p:cxnSp>
-        <p:nvCxnSpPr>
-          <p:cNvPr id="7" name="arrow 5" descr="sci-ppt:obj-005"/>
-          <p:cNvCxnSpPr/>
-          <p:nvPr/>
-        </p:nvCxnSpPr>
-        <p:spPr>
-          <a:xfrm>
-            <a:off x="1792224" y="1645920"/>
-            <a:ext cx="517262" cy="517262"/>
-          </a:xfrm>
-          <a:prstGeom prst="line">
-            <a:avLst/>
-          </a:prstGeom>
-          <a:ln w="21590">
-            <a:solidFill>
-              <a:srgbClr val="8EDBD4"/>
-            </a:solidFill>
-            <a:headEnd type="none" w="med" len="med"/>
-            <a:tailEnd type="triangle" w="med" len="med"/>
-          </a:ln>
-          <a:effectLst/>
-        </p:spPr>
-      </p:cxnSp>
-      <p:sp>
-        <p:nvSpPr>
-          <p:cNvPr id="8" name="text 6" descr="sci-ppt:obj-006"/>
+              <a:t>q³ = 1 − (R³ − R_ref³)/r³</a:t>
+            </a:r>
+          </a:p>
+        </p:txBody>
+      </p:sp>
+      <p:sp>
+        <p:nvSpPr>
+          <p:cNvPr id="53" name="A-E04 text 51" descr="sci-ppt:o051"/>
           <p:cNvSpPr txBox="1"/>
           <p:nvPr/>
         </p:nvSpPr>
         <p:spPr>
           <a:xfrm>
-            <a:off x="2304288" y="2139696"/>
-            <a:ext cx="822960" cy="310896"/>
+            <a:off x="8321040" y="2377440"/>
+            <a:ext cx="3429000" cy="223900"/>
           </a:xfrm>
           <a:prstGeom prst="rect">
             <a:avLst/>
@@ -3304,7 +6007,7 @@
           <a:effectLst/>
         </p:spPr>
         <p:txBody>
-          <a:bodyPr wrap="none" lIns="0" rIns="0" tIns="0" bIns="0" anchor="ctr">
+          <a:bodyPr wrap="none" lIns="18288" rIns="18288" tIns="18288" bIns="18288" anchor="t">
             <a:spAutoFit/>
           </a:bodyPr>
           <a:lstStyle/>
@@ -3315,113 +6018,27 @@
               </a:spcAft>
             </a:pPr>
             <a:r>
-              <a:rPr sz="1296" b="0" i="0">
+              <a:rPr sz="1150" b="1" i="0">
                 <a:solidFill>
                   <a:srgbClr val="E7F0F3"/>
                 </a:solidFill>
                 <a:latin typeface="Arial"/>
               </a:rPr>
-              <a:t>r₀</a:t>
-            </a:r>
-          </a:p>
-        </p:txBody>
-      </p:sp>
-      <p:sp>
-        <p:nvSpPr>
-          <p:cNvPr id="9" name="ellipse 7" descr="sci-ppt:obj-007"/>
-          <p:cNvSpPr/>
-          <p:nvPr/>
-        </p:nvSpPr>
-        <p:spPr>
-          <a:xfrm>
-            <a:off x="4682139" y="750219"/>
-            <a:ext cx="1791401" cy="1791401"/>
-          </a:xfrm>
-          <a:prstGeom prst="ellipse">
-            <a:avLst/>
-          </a:prstGeom>
-          <a:noFill/>
-          <a:ln w="17780">
-            <a:solidFill>
-              <a:srgbClr val="B4C7D2"/>
-            </a:solidFill>
-          </a:ln>
-          <a:effectLst/>
-        </p:spPr>
-        <p:txBody>
-          <a:bodyPr rtlCol="0" anchor="ctr"/>
-          <a:lstStyle/>
-          <a:p>
-            <a:pPr algn="ctr"/>
-          </a:p>
-        </p:txBody>
-      </p:sp>
-      <p:sp>
-        <p:nvSpPr>
-          <p:cNvPr id="10" name="ellipse 8" descr="sci-ppt:obj-008"/>
-          <p:cNvSpPr/>
-          <p:nvPr/>
-        </p:nvSpPr>
-        <p:spPr>
-          <a:xfrm>
-            <a:off x="4864608" y="932688"/>
-            <a:ext cx="1426464" cy="1426464"/>
-          </a:xfrm>
-          <a:prstGeom prst="ellipse">
-            <a:avLst/>
-          </a:prstGeom>
-          <a:solidFill>
-            <a:srgbClr val="213E4B"/>
-          </a:solidFill>
-          <a:ln w="17780">
-            <a:solidFill>
-              <a:srgbClr val="B4C7D2"/>
-            </a:solidFill>
-          </a:ln>
-          <a:effectLst/>
-        </p:spPr>
-        <p:txBody>
-          <a:bodyPr rtlCol="0" anchor="ctr"/>
-          <a:lstStyle/>
-          <a:p>
-            <a:pPr algn="ctr"/>
-          </a:p>
-        </p:txBody>
-      </p:sp>
-      <p:cxnSp>
-        <p:nvCxnSpPr>
-          <p:cNvPr id="11" name="arrow 9" descr="sci-ppt:obj-009"/>
-          <p:cNvCxnSpPr/>
-          <p:nvPr/>
-        </p:nvCxnSpPr>
-        <p:spPr>
-          <a:xfrm>
-            <a:off x="5577840" y="1645920"/>
-            <a:ext cx="713232" cy="0"/>
-          </a:xfrm>
-          <a:prstGeom prst="line">
-            <a:avLst/>
-          </a:prstGeom>
-          <a:ln w="21590">
-            <a:solidFill>
-              <a:srgbClr val="8EDBD4"/>
-            </a:solidFill>
-            <a:headEnd type="none" w="med" len="med"/>
-            <a:tailEnd type="triangle" w="med" len="med"/>
-          </a:ln>
-          <a:effectLst/>
-        </p:spPr>
-      </p:cxnSp>
-      <p:sp>
-        <p:nvSpPr>
-          <p:cNvPr id="12" name="text 10" descr="sci-ppt:obj-010"/>
+              <a:t>dr/r = q² dq / (1 − q³)</a:t>
+            </a:r>
+          </a:p>
+        </p:txBody>
+      </p:sp>
+      <p:sp>
+        <p:nvSpPr>
+          <p:cNvPr id="54" name="A-E04 text 52" descr="sci-ppt:o052"/>
           <p:cNvSpPr txBox="1"/>
           <p:nvPr/>
         </p:nvSpPr>
         <p:spPr>
           <a:xfrm>
-            <a:off x="5952744" y="1271016"/>
-            <a:ext cx="640080" cy="310896"/>
+            <a:off x="8321040" y="2926080"/>
+            <a:ext cx="3429000" cy="231648"/>
           </a:xfrm>
           <a:prstGeom prst="rect">
             <a:avLst/>
@@ -3430,7 +6047,7 @@
           <a:effectLst/>
         </p:spPr>
         <p:txBody>
-          <a:bodyPr wrap="none" lIns="0" rIns="0" tIns="0" bIns="0" anchor="ctr">
+          <a:bodyPr wrap="none" lIns="18288" rIns="18288" tIns="18288" bIns="18288" anchor="t">
             <a:spAutoFit/>
           </a:bodyPr>
           <a:lstStyle/>
@@ -3441,51 +6058,123 @@
               </a:spcAft>
             </a:pPr>
             <a:r>
-              <a:rPr sz="1296" b="0" i="0">
+              <a:rPr sz="1200" b="1" i="0">
+                <a:solidFill>
+                  <a:srgbClr val="F2B880"/>
+                </a:solidFill>
+                <a:latin typeface="Arial"/>
+              </a:rPr>
+              <a:t>(q⁻² − q⁴) dr/r = (1 + q³) dq</a:t>
+            </a:r>
+          </a:p>
+        </p:txBody>
+      </p:sp>
+      <p:sp>
+        <p:nvSpPr>
+          <p:cNvPr id="55" name="A-E04 text 53" descr="sci-ppt:o053"/>
+          <p:cNvSpPr txBox="1"/>
+          <p:nvPr/>
+        </p:nvSpPr>
+        <p:spPr>
+          <a:xfrm>
+            <a:off x="8321040" y="3657600"/>
+            <a:ext cx="3429000" cy="402081"/>
+          </a:xfrm>
+          <a:prstGeom prst="rect">
+            <a:avLst/>
+          </a:prstGeom>
+          <a:noFill/>
+          <a:effectLst/>
+        </p:spPr>
+        <p:txBody>
+          <a:bodyPr wrap="none" lIns="18288" rIns="18288" tIns="18288" bIns="18288" anchor="t">
+            <a:spAutoFit/>
+          </a:bodyPr>
+          <a:lstStyle/>
+          <a:p>
+            <a:pPr algn="l">
+              <a:spcAft>
+                <a:spcPts val="0"/>
+              </a:spcAft>
+            </a:pPr>
+            <a:r>
+              <a:rPr sz="1150" b="0" i="0">
+                <a:solidFill>
+                  <a:srgbClr val="B4C7D2"/>
+                </a:solidFill>
+                <a:latin typeface="Arial"/>
+              </a:rPr>
+              <a:t>A messy spatial integral becomes a</a:t>
+            </a:r>
+          </a:p>
+          <a:p>
+            <a:pPr algn="l">
+              <a:spcAft>
+                <a:spcPts val="0"/>
+              </a:spcAft>
+            </a:pPr>
+            <a:r>
+              <a:rPr sz="1150" b="0" i="0">
+                <a:solidFill>
+                  <a:srgbClr val="B4C7D2"/>
+                </a:solidFill>
+                <a:latin typeface="Arial"/>
+              </a:rPr>
+              <a:t>polynomial.</a:t>
+            </a:r>
+          </a:p>
+        </p:txBody>
+      </p:sp>
+      <p:sp>
+        <p:nvSpPr>
+          <p:cNvPr id="56" name="A-E04 text 54" descr="sci-ppt:o054"/>
+          <p:cNvSpPr txBox="1"/>
+          <p:nvPr/>
+        </p:nvSpPr>
+        <p:spPr>
+          <a:xfrm>
+            <a:off x="914400" y="5486400"/>
+            <a:ext cx="10972800" cy="239395"/>
+          </a:xfrm>
+          <a:prstGeom prst="rect">
+            <a:avLst/>
+          </a:prstGeom>
+          <a:noFill/>
+          <a:effectLst/>
+        </p:spPr>
+        <p:txBody>
+          <a:bodyPr wrap="none" lIns="18288" rIns="18288" tIns="18288" bIns="18288" anchor="t">
+            <a:spAutoFit/>
+          </a:bodyPr>
+          <a:lstStyle/>
+          <a:p>
+            <a:pPr algn="l">
+              <a:spcAft>
+                <a:spcPts val="0"/>
+              </a:spcAft>
+            </a:pPr>
+            <a:r>
+              <a:rPr sz="1250" b="0" i="0">
                 <a:solidFill>
                   <a:srgbClr val="E7F0F3"/>
                 </a:solidFill>
                 <a:latin typeface="Arial"/>
               </a:rPr>
-              <a:t>R</a:t>
-            </a:r>
-          </a:p>
-        </p:txBody>
-      </p:sp>
-      <p:cxnSp>
-        <p:nvCxnSpPr>
-          <p:cNvPr id="13" name="arrow 11" descr="sci-ppt:obj-011"/>
-          <p:cNvCxnSpPr/>
-          <p:nvPr/>
-        </p:nvCxnSpPr>
-        <p:spPr>
-          <a:xfrm>
-            <a:off x="5577840" y="1645920"/>
-            <a:ext cx="633355" cy="633355"/>
-          </a:xfrm>
-          <a:prstGeom prst="line">
-            <a:avLst/>
-          </a:prstGeom>
-          <a:ln w="21590">
-            <a:solidFill>
-              <a:srgbClr val="8EDBD4"/>
-            </a:solidFill>
-            <a:headEnd type="none" w="med" len="med"/>
-            <a:tailEnd type="triangle" w="med" len="med"/>
-          </a:ln>
-          <a:effectLst/>
-        </p:spPr>
-      </p:cxnSp>
-      <p:sp>
-        <p:nvSpPr>
-          <p:cNvPr id="14" name="text 12" descr="sci-ppt:obj-012"/>
+              <a:t>Check: (q⁻² − q⁴) q²/(1 − q³) = 1 + q³ on the whole range (max difference 1.3e-14).</a:t>
+            </a:r>
+          </a:p>
+        </p:txBody>
+      </p:sp>
+      <p:sp>
+        <p:nvSpPr>
+          <p:cNvPr id="57" name="A-E04 text 55" descr="sci-ppt:o055"/>
           <p:cNvSpPr txBox="1"/>
           <p:nvPr/>
         </p:nvSpPr>
         <p:spPr>
           <a:xfrm>
-            <a:off x="6373368" y="2231136"/>
-            <a:ext cx="640080" cy="310896"/>
+            <a:off x="320040" y="6510528"/>
+            <a:ext cx="11521440" cy="200660"/>
           </a:xfrm>
           <a:prstGeom prst="rect">
             <a:avLst/>
@@ -3494,7 +6183,7 @@
           <a:effectLst/>
         </p:spPr>
         <p:txBody>
-          <a:bodyPr wrap="none" lIns="0" rIns="0" tIns="0" bIns="0" anchor="ctr">
+          <a:bodyPr wrap="none" lIns="18288" rIns="18288" tIns="18288" bIns="18288" anchor="t">
             <a:spAutoFit/>
           </a:bodyPr>
           <a:lstStyle/>
@@ -3505,677 +6194,13 @@
               </a:spcAft>
             </a:pPr>
             <a:r>
-              <a:rPr sz="1296" b="0" i="0">
+              <a:rPr sz="1000" b="0" i="0">
                 <a:solidFill>
-                  <a:srgbClr val="E7F0F3"/>
+                  <a:srgbClr val="B4C7D2"/>
                 </a:solidFill>
                 <a:latin typeface="Arial"/>
               </a:rPr>
-              <a:t>r</a:t>
-            </a:r>
-          </a:p>
-        </p:txBody>
-      </p:sp>
-      <p:cxnSp>
-        <p:nvCxnSpPr>
-          <p:cNvPr id="15" name="arrow 13" descr="sci-ppt:obj-013"/>
-          <p:cNvCxnSpPr/>
-          <p:nvPr/>
-        </p:nvCxnSpPr>
-        <p:spPr>
-          <a:xfrm>
-            <a:off x="2697480" y="1645920"/>
-            <a:ext cx="1691640" cy="0"/>
-          </a:xfrm>
-          <a:prstGeom prst="line">
-            <a:avLst/>
-          </a:prstGeom>
-          <a:ln w="21590">
-            <a:solidFill>
-              <a:srgbClr val="8EDBD4"/>
-            </a:solidFill>
-            <a:headEnd type="none" w="med" len="med"/>
-            <a:tailEnd type="triangle" w="med" len="med"/>
-          </a:ln>
-          <a:effectLst/>
-        </p:spPr>
-      </p:cxnSp>
-      <p:sp>
-        <p:nvSpPr>
-          <p:cNvPr id="16" name="text 14" descr="sci-ppt:obj-014"/>
-          <p:cNvSpPr txBox="1"/>
-          <p:nvPr/>
-        </p:nvSpPr>
-        <p:spPr>
-          <a:xfrm>
-            <a:off x="2834640" y="1143000"/>
-            <a:ext cx="2286000" cy="310896"/>
-          </a:xfrm>
-          <a:prstGeom prst="rect">
-            <a:avLst/>
-          </a:prstGeom>
-          <a:noFill/>
-          <a:effectLst/>
-        </p:spPr>
-        <p:txBody>
-          <a:bodyPr wrap="none" lIns="0" rIns="0" tIns="0" bIns="0" anchor="ctr">
-            <a:spAutoFit/>
-          </a:bodyPr>
-          <a:lstStyle/>
-          <a:p>
-            <a:pPr algn="l">
-              <a:spcAft>
-                <a:spcPts val="0"/>
-              </a:spcAft>
-            </a:pPr>
-            <a:r>
-              <a:rPr sz="1296" b="0" i="0">
-                <a:solidFill>
-                  <a:srgbClr val="E7F0F3"/>
-                </a:solidFill>
-                <a:latin typeface="Arial"/>
-              </a:rPr>
-              <a:t>Material map</a:t>
-            </a:r>
-          </a:p>
-        </p:txBody>
-      </p:sp>
-      <p:sp>
-        <p:nvSpPr>
-          <p:cNvPr id="17" name="text 15" descr="sci-ppt:obj-015"/>
-          <p:cNvSpPr txBox="1"/>
-          <p:nvPr/>
-        </p:nvSpPr>
-        <p:spPr>
-          <a:xfrm>
-            <a:off x="1005840" y="2578608"/>
-            <a:ext cx="2286000" cy="310896"/>
-          </a:xfrm>
-          <a:prstGeom prst="rect">
-            <a:avLst/>
-          </a:prstGeom>
-          <a:noFill/>
-          <a:effectLst/>
-        </p:spPr>
-        <p:txBody>
-          <a:bodyPr wrap="none" lIns="0" rIns="0" tIns="0" bIns="0" anchor="ctr">
-            <a:spAutoFit/>
-          </a:bodyPr>
-          <a:lstStyle/>
-          <a:p>
-            <a:pPr algn="l">
-              <a:spcAft>
-                <a:spcPts val="0"/>
-              </a:spcAft>
-            </a:pPr>
-            <a:r>
-              <a:rPr sz="1296" b="0" i="0">
-                <a:solidFill>
-                  <a:srgbClr val="E7F0F3"/>
-                </a:solidFill>
-                <a:latin typeface="Arial"/>
-              </a:rPr>
-              <a:t>Reference</a:t>
-            </a:r>
-          </a:p>
-        </p:txBody>
-      </p:sp>
-      <p:sp>
-        <p:nvSpPr>
-          <p:cNvPr id="18" name="text 16" descr="sci-ppt:obj-016"/>
-          <p:cNvSpPr txBox="1"/>
-          <p:nvPr/>
-        </p:nvSpPr>
-        <p:spPr>
-          <a:xfrm>
-            <a:off x="4846320" y="2660904"/>
-            <a:ext cx="3383280" cy="310896"/>
-          </a:xfrm>
-          <a:prstGeom prst="rect">
-            <a:avLst/>
-          </a:prstGeom>
-          <a:noFill/>
-          <a:effectLst/>
-        </p:spPr>
-        <p:txBody>
-          <a:bodyPr wrap="none" lIns="0" rIns="0" tIns="0" bIns="0" anchor="ctr">
-            <a:spAutoFit/>
-          </a:bodyPr>
-          <a:lstStyle/>
-          <a:p>
-            <a:pPr algn="l">
-              <a:spcAft>
-                <a:spcPts val="0"/>
-              </a:spcAft>
-            </a:pPr>
-            <a:r>
-              <a:rPr sz="1296" b="0" i="0">
-                <a:solidFill>
-                  <a:srgbClr val="E7F0F3"/>
-                </a:solidFill>
-                <a:latin typeface="Arial"/>
-              </a:rPr>
-              <a:t>Deformed: λr , λθ</a:t>
-            </a:r>
-          </a:p>
-        </p:txBody>
-      </p:sp>
-      <p:sp>
-        <p:nvSpPr>
-          <p:cNvPr id="19" name="text 17" descr="sci-ppt:obj-017"/>
-          <p:cNvSpPr txBox="1"/>
-          <p:nvPr/>
-        </p:nvSpPr>
-        <p:spPr>
-          <a:xfrm>
-            <a:off x="6839712" y="777240"/>
-            <a:ext cx="1645920" cy="310896"/>
-          </a:xfrm>
-          <a:prstGeom prst="rect">
-            <a:avLst/>
-          </a:prstGeom>
-          <a:noFill/>
-          <a:effectLst/>
-        </p:spPr>
-        <p:txBody>
-          <a:bodyPr wrap="none" lIns="0" rIns="0" tIns="0" bIns="0" anchor="ctr">
-            <a:spAutoFit/>
-          </a:bodyPr>
-          <a:lstStyle/>
-          <a:p>
-            <a:pPr algn="l">
-              <a:spcAft>
-                <a:spcPts val="0"/>
-              </a:spcAft>
-            </a:pPr>
-            <a:r>
-              <a:rPr sz="1296" b="0" i="0">
-                <a:solidFill>
-                  <a:srgbClr val="E7F0F3"/>
-                </a:solidFill>
-                <a:latin typeface="Arial"/>
-              </a:rPr>
-              <a:t>Gg , ηg</a:t>
-            </a:r>
-          </a:p>
-        </p:txBody>
-      </p:sp>
-      <p:sp>
-        <p:nvSpPr>
-          <p:cNvPr id="20" name="text 18" descr="sci-ppt:obj-018"/>
-          <p:cNvSpPr txBox="1"/>
-          <p:nvPr/>
-        </p:nvSpPr>
-        <p:spPr>
-          <a:xfrm>
-            <a:off x="6839712" y="1207008"/>
-            <a:ext cx="1828800" cy="310896"/>
-          </a:xfrm>
-          <a:prstGeom prst="rect">
-            <a:avLst/>
-          </a:prstGeom>
-          <a:noFill/>
-          <a:effectLst/>
-        </p:spPr>
-        <p:txBody>
-          <a:bodyPr wrap="none" lIns="0" rIns="0" tIns="0" bIns="0" anchor="ctr">
-            <a:spAutoFit/>
-          </a:bodyPr>
-          <a:lstStyle/>
-          <a:p>
-            <a:pPr algn="l">
-              <a:spcAft>
-                <a:spcPts val="0"/>
-              </a:spcAft>
-            </a:pPr>
-            <a:r>
-              <a:rPr sz="1296" b="0" i="0">
-                <a:solidFill>
-                  <a:srgbClr val="E7F0F3"/>
-                </a:solidFill>
-                <a:latin typeface="Arial"/>
-              </a:rPr>
-              <a:t>σrr , σθθ</a:t>
-            </a:r>
-          </a:p>
-        </p:txBody>
-      </p:sp>
-      <p:sp>
-        <p:nvSpPr>
-          <p:cNvPr id="21" name="text 19" descr="sci-ppt:obj-019"/>
-          <p:cNvSpPr txBox="1"/>
-          <p:nvPr/>
-        </p:nvSpPr>
-        <p:spPr>
-          <a:xfrm>
-            <a:off x="6839712" y="1645920"/>
-            <a:ext cx="1371600" cy="310896"/>
-          </a:xfrm>
-          <a:prstGeom prst="rect">
-            <a:avLst/>
-          </a:prstGeom>
-          <a:noFill/>
-          <a:effectLst/>
-        </p:spPr>
-        <p:txBody>
-          <a:bodyPr wrap="none" lIns="0" rIns="0" tIns="0" bIns="0" anchor="ctr">
-            <a:spAutoFit/>
-          </a:bodyPr>
-          <a:lstStyle/>
-          <a:p>
-            <a:pPr algn="l">
-              <a:spcAft>
-                <a:spcPts val="0"/>
-              </a:spcAft>
-            </a:pPr>
-            <a:r>
-              <a:rPr sz="1296" b="0" i="0">
-                <a:solidFill>
-                  <a:srgbClr val="E7F0F3"/>
-                </a:solidFill>
-                <a:latin typeface="Arial"/>
-              </a:rPr>
-              <a:t>p∞</a:t>
-            </a:r>
-          </a:p>
-        </p:txBody>
-      </p:sp>
-      <p:sp>
-        <p:nvSpPr>
-          <p:cNvPr id="22" name="text 20" descr="sci-ppt:obj-020"/>
-          <p:cNvSpPr txBox="1"/>
-          <p:nvPr/>
-        </p:nvSpPr>
-        <p:spPr>
-          <a:xfrm>
-            <a:off x="5266944" y="1682496"/>
-            <a:ext cx="822960" cy="310896"/>
-          </a:xfrm>
-          <a:prstGeom prst="rect">
-            <a:avLst/>
-          </a:prstGeom>
-          <a:noFill/>
-          <a:effectLst/>
-        </p:spPr>
-        <p:txBody>
-          <a:bodyPr wrap="none" lIns="0" rIns="0" tIns="0" bIns="0" anchor="ctr">
-            <a:spAutoFit/>
-          </a:bodyPr>
-          <a:lstStyle/>
-          <a:p>
-            <a:pPr algn="l">
-              <a:spcAft>
-                <a:spcPts val="0"/>
-              </a:spcAft>
-            </a:pPr>
-            <a:r>
-              <a:rPr sz="1296" b="0" i="0">
-                <a:solidFill>
-                  <a:srgbClr val="E7F0F3"/>
-                </a:solidFill>
-                <a:latin typeface="Arial"/>
-              </a:rPr>
-              <a:t>pb</a:t>
-            </a:r>
-          </a:p>
-        </p:txBody>
-      </p:sp>
-      <p:sp>
-        <p:nvSpPr>
-          <p:cNvPr id="23" name="text 21" descr="sci-ppt:obj-021"/>
-          <p:cNvSpPr txBox="1"/>
-          <p:nvPr/>
-        </p:nvSpPr>
-        <p:spPr>
-          <a:xfrm>
-            <a:off x="868680" y="2990088"/>
-            <a:ext cx="7772400" cy="310896"/>
-          </a:xfrm>
-          <a:prstGeom prst="rect">
-            <a:avLst/>
-          </a:prstGeom>
-          <a:noFill/>
-          <a:effectLst/>
-        </p:spPr>
-        <p:txBody>
-          <a:bodyPr wrap="none" lIns="0" rIns="0" tIns="0" bIns="0" anchor="ctr">
-            <a:spAutoFit/>
-          </a:bodyPr>
-          <a:lstStyle/>
-          <a:p>
-            <a:pPr algn="l">
-              <a:spcAft>
-                <a:spcPts val="0"/>
-              </a:spcAft>
-            </a:pPr>
-            <a:r>
-              <a:rPr sz="1152" b="0" i="0">
-                <a:solidFill>
-                  <a:srgbClr val="E7F0F3"/>
-                </a:solidFill>
-                <a:latin typeface="Arial"/>
-              </a:rPr>
-              <a:t>r₀³ − Rref³ = r³ − R³ ; radial coordinates point outward</a:t>
-            </a:r>
-          </a:p>
-        </p:txBody>
-      </p:sp>
-      <p:sp>
-        <p:nvSpPr>
-          <p:cNvPr id="24" name="text 22" descr="sci-ppt:obj-022"/>
-          <p:cNvSpPr txBox="1"/>
-          <p:nvPr/>
-        </p:nvSpPr>
-        <p:spPr>
-          <a:xfrm>
-            <a:off x="256032" y="3465576"/>
-            <a:ext cx="7315200" cy="310896"/>
-          </a:xfrm>
-          <a:prstGeom prst="rect">
-            <a:avLst/>
-          </a:prstGeom>
-          <a:noFill/>
-          <a:effectLst/>
-        </p:spPr>
-        <p:txBody>
-          <a:bodyPr wrap="none" lIns="0" rIns="0" tIns="0" bIns="0" anchor="ctr">
-            <a:spAutoFit/>
-          </a:bodyPr>
-          <a:lstStyle/>
-          <a:p>
-            <a:pPr algn="l">
-              <a:spcAft>
-                <a:spcPts val="0"/>
-              </a:spcAft>
-            </a:pPr>
-            <a:r>
-              <a:rPr sz="1296" b="0" i="0">
-                <a:solidFill>
-                  <a:srgbClr val="8EDBD4"/>
-                </a:solidFill>
-                <a:latin typeface="Arial"/>
-              </a:rPr>
-              <a:t>Variables and physical limits</a:t>
-            </a:r>
-          </a:p>
-        </p:txBody>
-      </p:sp>
-      <p:sp>
-        <p:nvSpPr>
-          <p:cNvPr id="25" name="text 23" descr="sci-ppt:obj-023"/>
-          <p:cNvSpPr txBox="1"/>
-          <p:nvPr/>
-        </p:nvSpPr>
-        <p:spPr>
-          <a:xfrm>
-            <a:off x="365760" y="3813048"/>
-            <a:ext cx="8412480" cy="310896"/>
-          </a:xfrm>
-          <a:prstGeom prst="rect">
-            <a:avLst/>
-          </a:prstGeom>
-          <a:noFill/>
-          <a:effectLst/>
-        </p:spPr>
-        <p:txBody>
-          <a:bodyPr wrap="none" lIns="0" rIns="0" tIns="0" bIns="0" anchor="ctr">
-            <a:spAutoFit/>
-          </a:bodyPr>
-          <a:lstStyle/>
-          <a:p>
-            <a:pPr algn="l">
-              <a:spcAft>
-                <a:spcPts val="0"/>
-              </a:spcAft>
-            </a:pPr>
-            <a:r>
-              <a:rPr sz="1152" b="0" i="0">
-                <a:solidFill>
-                  <a:srgbClr val="E7F0F3"/>
-                </a:solidFill>
-                <a:latin typeface="Arial"/>
-              </a:rPr>
-              <a:t>• qwall = Rref/R</a:t>
-            </a:r>
-          </a:p>
-        </p:txBody>
-      </p:sp>
-      <p:sp>
-        <p:nvSpPr>
-          <p:cNvPr id="26" name="text 24" descr="sci-ppt:obj-024"/>
-          <p:cNvSpPr txBox="1"/>
-          <p:nvPr/>
-        </p:nvSpPr>
-        <p:spPr>
-          <a:xfrm>
-            <a:off x="365760" y="4023360"/>
-            <a:ext cx="8412480" cy="310896"/>
-          </a:xfrm>
-          <a:prstGeom prst="rect">
-            <a:avLst/>
-          </a:prstGeom>
-          <a:noFill/>
-          <a:effectLst/>
-        </p:spPr>
-        <p:txBody>
-          <a:bodyPr wrap="none" lIns="0" rIns="0" tIns="0" bIns="0" anchor="ctr">
-            <a:spAutoFit/>
-          </a:bodyPr>
-          <a:lstStyle/>
-          <a:p>
-            <a:pPr algn="l">
-              <a:spcAft>
-                <a:spcPts val="0"/>
-              </a:spcAft>
-            </a:pPr>
-            <a:r>
-              <a:rPr sz="1152" b="0" i="0">
-                <a:solidFill>
-                  <a:srgbClr val="E7F0F3"/>
-                </a:solidFill>
-                <a:latin typeface="Arial"/>
-              </a:rPr>
-              <a:t>• q → 1 far away</a:t>
-            </a:r>
-          </a:p>
-        </p:txBody>
-      </p:sp>
-      <p:sp>
-        <p:nvSpPr>
-          <p:cNvPr id="27" name="text 25" descr="sci-ppt:obj-025"/>
-          <p:cNvSpPr txBox="1"/>
-          <p:nvPr/>
-        </p:nvSpPr>
-        <p:spPr>
-          <a:xfrm>
-            <a:off x="365760" y="4233672"/>
-            <a:ext cx="8412480" cy="310896"/>
-          </a:xfrm>
-          <a:prstGeom prst="rect">
-            <a:avLst/>
-          </a:prstGeom>
-          <a:noFill/>
-          <a:effectLst/>
-        </p:spPr>
-        <p:txBody>
-          <a:bodyPr wrap="none" lIns="0" rIns="0" tIns="0" bIns="0" anchor="ctr">
-            <a:spAutoFit/>
-          </a:bodyPr>
-          <a:lstStyle/>
-          <a:p>
-            <a:pPr algn="l">
-              <a:spcAft>
-                <a:spcPts val="0"/>
-              </a:spcAft>
-            </a:pPr>
-            <a:r>
-              <a:rPr sz="1152" b="0" i="0">
-                <a:solidFill>
-                  <a:srgbClr val="E7F0F3"/>
-                </a:solidFill>
-                <a:latin typeface="Arial"/>
-              </a:rPr>
-              <a:t>• r₀/r = q</a:t>
-            </a:r>
-          </a:p>
-        </p:txBody>
-      </p:sp>
-      <p:sp>
-        <p:nvSpPr>
-          <p:cNvPr id="28" name="text 26" descr="sci-ppt:obj-026"/>
-          <p:cNvSpPr txBox="1"/>
-          <p:nvPr/>
-        </p:nvSpPr>
-        <p:spPr>
-          <a:xfrm>
-            <a:off x="365760" y="4443984"/>
-            <a:ext cx="8412480" cy="310896"/>
-          </a:xfrm>
-          <a:prstGeom prst="rect">
-            <a:avLst/>
-          </a:prstGeom>
-          <a:noFill/>
-          <a:effectLst/>
-        </p:spPr>
-        <p:txBody>
-          <a:bodyPr wrap="none" lIns="0" rIns="0" tIns="0" bIns="0" anchor="ctr">
-            <a:spAutoFit/>
-          </a:bodyPr>
-          <a:lstStyle/>
-          <a:p>
-            <a:pPr algn="l">
-              <a:spcAft>
-                <a:spcPts val="0"/>
-              </a:spcAft>
-            </a:pPr>
-            <a:r>
-              <a:rPr sz="1152" b="0" i="0">
-                <a:solidFill>
-                  <a:srgbClr val="E7F0F3"/>
-                </a:solidFill>
-                <a:latin typeface="Arial"/>
-              </a:rPr>
-              <a:t>• R, Rref, r, r₀</a:t>
-            </a:r>
-          </a:p>
-        </p:txBody>
-      </p:sp>
-      <p:sp>
-        <p:nvSpPr>
-          <p:cNvPr id="29" name="text 27" descr="sci-ppt:obj-027"/>
-          <p:cNvSpPr txBox="1"/>
-          <p:nvPr/>
-        </p:nvSpPr>
-        <p:spPr>
-          <a:xfrm>
-            <a:off x="365760" y="4654296"/>
-            <a:ext cx="8412480" cy="310896"/>
-          </a:xfrm>
-          <a:prstGeom prst="rect">
-            <a:avLst/>
-          </a:prstGeom>
-          <a:noFill/>
-          <a:effectLst/>
-        </p:spPr>
-        <p:txBody>
-          <a:bodyPr wrap="none" lIns="0" rIns="0" tIns="0" bIns="0" anchor="ctr">
-            <a:spAutoFit/>
-          </a:bodyPr>
-          <a:lstStyle/>
-          <a:p>
-            <a:pPr algn="l">
-              <a:spcAft>
-                <a:spcPts val="0"/>
-              </a:spcAft>
-            </a:pPr>
-            <a:r>
-              <a:rPr sz="1152" b="0" i="0">
-                <a:solidFill>
-                  <a:srgbClr val="E7F0F3"/>
-                </a:solidFill>
-                <a:latin typeface="Arial"/>
-              </a:rPr>
-              <a:t>• dr/r ↔ q²dq/(1−q³)</a:t>
-            </a:r>
-          </a:p>
-        </p:txBody>
-      </p:sp>
-      <p:sp>
-        <p:nvSpPr>
-          <p:cNvPr id="30" name="text 28" descr="sci-ppt:obj-028"/>
-          <p:cNvSpPr txBox="1"/>
-          <p:nvPr/>
-        </p:nvSpPr>
-        <p:spPr>
-          <a:xfrm>
-            <a:off x="365760" y="4864608"/>
-            <a:ext cx="8412480" cy="310896"/>
-          </a:xfrm>
-          <a:prstGeom prst="rect">
-            <a:avLst/>
-          </a:prstGeom>
-          <a:noFill/>
-          <a:effectLst/>
-        </p:spPr>
-        <p:txBody>
-          <a:bodyPr wrap="none" lIns="0" rIns="0" tIns="0" bIns="0" anchor="ctr">
-            <a:spAutoFit/>
-          </a:bodyPr>
-          <a:lstStyle/>
-          <a:p>
-            <a:pPr algn="l">
-              <a:spcAft>
-                <a:spcPts val="0"/>
-              </a:spcAft>
-            </a:pPr>
-            <a:r>
-              <a:rPr sz="1152" b="0" i="0">
-                <a:solidFill>
-                  <a:srgbClr val="E7F0F3"/>
-                </a:solidFill>
-                <a:latin typeface="Arial"/>
-              </a:rPr>
-              <a:t>Mapped limits retain the wall and infinity</a:t>
-            </a:r>
-          </a:p>
-        </p:txBody>
-      </p:sp>
-      <p:sp>
-        <p:nvSpPr>
-          <p:cNvPr id="31" name="text 29" descr="sci-ppt:obj-029"/>
-          <p:cNvSpPr txBox="1"/>
-          <p:nvPr/>
-        </p:nvSpPr>
-        <p:spPr>
-          <a:xfrm>
-            <a:off x="365760" y="5074920"/>
-            <a:ext cx="8412480" cy="310896"/>
-          </a:xfrm>
-          <a:prstGeom prst="rect">
-            <a:avLst/>
-          </a:prstGeom>
-          <a:noFill/>
-          <a:effectLst/>
-        </p:spPr>
-        <p:txBody>
-          <a:bodyPr wrap="none" lIns="0" rIns="0" tIns="0" bIns="0" anchor="ctr">
-            <a:spAutoFit/>
-          </a:bodyPr>
-          <a:lstStyle/>
-          <a:p>
-            <a:pPr algn="l">
-              <a:spcAft>
-                <a:spcPts val="0"/>
-              </a:spcAft>
-            </a:pPr>
-            <a:r>
-              <a:rPr sz="1152" b="0" i="0">
-                <a:solidFill>
-                  <a:srgbClr val="E7F0F3"/>
-                </a:solidFill>
-                <a:latin typeface="Arial"/>
-              </a:rPr>
-              <a:t>Factorization removes the apparent endpoint singularity</a:t>
+              <a:t>Exact change of variable of Eq. A-E04.</a:t>
             </a:r>
           </a:p>
         </p:txBody>
